--- a/courses/261/vaccines.pptx
+++ b/courses/261/vaccines.pptx
@@ -5,7 +5,7 @@
     <p:sldMasterId id="2147483648" r:id="rId1"/>
   </p:sldMasterIdLst>
   <p:notesMasterIdLst>
-    <p:notesMasterId r:id="rId7"/>
+    <p:notesMasterId r:id="rId8"/>
   </p:notesMasterIdLst>
   <p:sldIdLst>
     <p:sldId id="729" r:id="rId2"/>
@@ -13,6 +13,7 @@
     <p:sldId id="727" r:id="rId4"/>
     <p:sldId id="264" r:id="rId5"/>
     <p:sldId id="617" r:id="rId6"/>
+    <p:sldId id="735" r:id="rId7"/>
   </p:sldIdLst>
   <p:sldSz cx="12192000" cy="6858000"/>
   <p:notesSz cx="6858000" cy="9144000"/>
@@ -204,7 +205,7 @@
           <a:p>
             <a:fld id="{3C487A08-71BD-4802-BA4F-D9BAA04912EF}" type="datetimeFigureOut">
               <a:rPr lang="en-US" smtClean="0"/>
-              <a:t>11/11/2025</a:t>
+              <a:t>11/12/2025</a:t>
             </a:fld>
             <a:endParaRPr lang="en-US" dirty="0"/>
           </a:p>
@@ -1004,7 +1005,7 @@
           <a:p>
             <a:fld id="{22E198F2-9BB6-425A-9FF9-F2F148E1B301}" type="datetimeFigureOut">
               <a:rPr lang="en-US" smtClean="0"/>
-              <a:t>11/11/2025</a:t>
+              <a:t>11/12/2025</a:t>
             </a:fld>
             <a:endParaRPr lang="en-US" dirty="0"/>
           </a:p>
@@ -1172,7 +1173,7 @@
           <a:p>
             <a:fld id="{22E198F2-9BB6-425A-9FF9-F2F148E1B301}" type="datetimeFigureOut">
               <a:rPr lang="en-US" smtClean="0"/>
-              <a:t>11/11/2025</a:t>
+              <a:t>11/12/2025</a:t>
             </a:fld>
             <a:endParaRPr lang="en-US" dirty="0"/>
           </a:p>
@@ -1350,7 +1351,7 @@
           <a:p>
             <a:fld id="{22E198F2-9BB6-425A-9FF9-F2F148E1B301}" type="datetimeFigureOut">
               <a:rPr lang="en-US" smtClean="0"/>
-              <a:t>11/11/2025</a:t>
+              <a:t>11/12/2025</a:t>
             </a:fld>
             <a:endParaRPr lang="en-US" dirty="0"/>
           </a:p>
@@ -1518,7 +1519,7 @@
           <a:p>
             <a:fld id="{22E198F2-9BB6-425A-9FF9-F2F148E1B301}" type="datetimeFigureOut">
               <a:rPr lang="en-US" smtClean="0"/>
-              <a:t>11/11/2025</a:t>
+              <a:t>11/12/2025</a:t>
             </a:fld>
             <a:endParaRPr lang="en-US" dirty="0"/>
           </a:p>
@@ -1763,7 +1764,7 @@
           <a:p>
             <a:fld id="{22E198F2-9BB6-425A-9FF9-F2F148E1B301}" type="datetimeFigureOut">
               <a:rPr lang="en-US" smtClean="0"/>
-              <a:t>11/11/2025</a:t>
+              <a:t>11/12/2025</a:t>
             </a:fld>
             <a:endParaRPr lang="en-US" dirty="0"/>
           </a:p>
@@ -1992,7 +1993,7 @@
           <a:p>
             <a:fld id="{22E198F2-9BB6-425A-9FF9-F2F148E1B301}" type="datetimeFigureOut">
               <a:rPr lang="en-US" smtClean="0"/>
-              <a:t>11/11/2025</a:t>
+              <a:t>11/12/2025</a:t>
             </a:fld>
             <a:endParaRPr lang="en-US" dirty="0"/>
           </a:p>
@@ -2356,7 +2357,7 @@
           <a:p>
             <a:fld id="{22E198F2-9BB6-425A-9FF9-F2F148E1B301}" type="datetimeFigureOut">
               <a:rPr lang="en-US" smtClean="0"/>
-              <a:t>11/11/2025</a:t>
+              <a:t>11/12/2025</a:t>
             </a:fld>
             <a:endParaRPr lang="en-US" dirty="0"/>
           </a:p>
@@ -2473,7 +2474,7 @@
           <a:p>
             <a:fld id="{22E198F2-9BB6-425A-9FF9-F2F148E1B301}" type="datetimeFigureOut">
               <a:rPr lang="en-US" smtClean="0"/>
-              <a:t>11/11/2025</a:t>
+              <a:t>11/12/2025</a:t>
             </a:fld>
             <a:endParaRPr lang="en-US" dirty="0"/>
           </a:p>
@@ -2568,7 +2569,7 @@
           <a:p>
             <a:fld id="{22E198F2-9BB6-425A-9FF9-F2F148E1B301}" type="datetimeFigureOut">
               <a:rPr lang="en-US" smtClean="0"/>
-              <a:t>11/11/2025</a:t>
+              <a:t>11/12/2025</a:t>
             </a:fld>
             <a:endParaRPr lang="en-US" dirty="0"/>
           </a:p>
@@ -2843,7 +2844,7 @@
           <a:p>
             <a:fld id="{22E198F2-9BB6-425A-9FF9-F2F148E1B301}" type="datetimeFigureOut">
               <a:rPr lang="en-US" smtClean="0"/>
-              <a:t>11/11/2025</a:t>
+              <a:t>11/12/2025</a:t>
             </a:fld>
             <a:endParaRPr lang="en-US" dirty="0"/>
           </a:p>
@@ -3095,7 +3096,7 @@
           <a:p>
             <a:fld id="{22E198F2-9BB6-425A-9FF9-F2F148E1B301}" type="datetimeFigureOut">
               <a:rPr lang="en-US" smtClean="0"/>
-              <a:t>11/11/2025</a:t>
+              <a:t>11/12/2025</a:t>
             </a:fld>
             <a:endParaRPr lang="en-US" dirty="0"/>
           </a:p>
@@ -3306,7 +3307,7 @@
           <a:p>
             <a:fld id="{22E198F2-9BB6-425A-9FF9-F2F148E1B301}" type="datetimeFigureOut">
               <a:rPr lang="en-US" smtClean="0"/>
-              <a:t>11/11/2025</a:t>
+              <a:t>11/12/2025</a:t>
             </a:fld>
             <a:endParaRPr lang="en-US" dirty="0"/>
           </a:p>
@@ -4294,6 +4295,124 @@
     <p:extLst>
       <p:ext uri="{BB962C8B-B14F-4D97-AF65-F5344CB8AC3E}">
         <p14:creationId xmlns:p14="http://schemas.microsoft.com/office/powerpoint/2010/main" val="277065640"/>
+      </p:ext>
+    </p:extLst>
+  </p:cSld>
+  <p:clrMapOvr>
+    <a:masterClrMapping/>
+  </p:clrMapOvr>
+</p:sld>
+</file>
+
+<file path=ppt/slides/slide6.xml><?xml version="1.0" encoding="utf-8"?>
+<p:sld xmlns:a="http://schemas.openxmlformats.org/drawingml/2006/main" xmlns:r="http://schemas.openxmlformats.org/officeDocument/2006/relationships" xmlns:p="http://schemas.openxmlformats.org/presentationml/2006/main">
+  <p:cSld>
+    <p:spTree>
+      <p:nvGrpSpPr>
+        <p:cNvPr id="1" name=""/>
+        <p:cNvGrpSpPr/>
+        <p:nvPr/>
+      </p:nvGrpSpPr>
+      <p:grpSpPr>
+        <a:xfrm>
+          <a:off x="0" y="0"/>
+          <a:ext cx="0" cy="0"/>
+          <a:chOff x="0" y="0"/>
+          <a:chExt cx="0" cy="0"/>
+        </a:xfrm>
+      </p:grpSpPr>
+      <p:sp>
+        <p:nvSpPr>
+          <p:cNvPr id="2" name="Title 1">
+            <a:extLst>
+              <a:ext uri="{FF2B5EF4-FFF2-40B4-BE49-F238E27FC236}">
+                <a16:creationId xmlns:a16="http://schemas.microsoft.com/office/drawing/2014/main" id="{54982F25-E825-5ED7-8135-5F0066FB03C3}"/>
+              </a:ext>
+            </a:extLst>
+          </p:cNvPr>
+          <p:cNvSpPr>
+            <a:spLocks noGrp="1"/>
+          </p:cNvSpPr>
+          <p:nvPr>
+            <p:ph type="title"/>
+          </p:nvPr>
+        </p:nvSpPr>
+        <p:spPr/>
+        <p:txBody>
+          <a:bodyPr/>
+          <a:lstStyle/>
+          <a:p>
+            <a:r>
+              <a:rPr lang="en-US" dirty="0"/>
+              <a:t>Full global components of the Pfizer BioNTech mRNA Covid vaccine</a:t>
+            </a:r>
+          </a:p>
+        </p:txBody>
+      </p:sp>
+      <p:sp>
+        <p:nvSpPr>
+          <p:cNvPr id="3" name="Content Placeholder 2">
+            <a:extLst>
+              <a:ext uri="{FF2B5EF4-FFF2-40B4-BE49-F238E27FC236}">
+                <a16:creationId xmlns:a16="http://schemas.microsoft.com/office/drawing/2014/main" id="{C301FBCC-191E-5645-BF6C-FDEC00D01F8C}"/>
+              </a:ext>
+            </a:extLst>
+          </p:cNvPr>
+          <p:cNvSpPr>
+            <a:spLocks noGrp="1"/>
+          </p:cNvSpPr>
+          <p:nvPr>
+            <p:ph idx="1"/>
+          </p:nvPr>
+        </p:nvSpPr>
+        <p:spPr/>
+        <p:txBody>
+          <a:bodyPr>
+            <a:normAutofit/>
+          </a:bodyPr>
+          <a:lstStyle/>
+          <a:p>
+            <a:r>
+              <a:rPr lang="en-US" dirty="0"/>
+              <a:t>Genome sequencing of virus and its public release (China)</a:t>
+            </a:r>
+          </a:p>
+          <a:p>
+            <a:r>
+              <a:rPr lang="en-US" dirty="0"/>
+              <a:t>Refinement and verification of genomic sequence (Australia, US, Europe, Asia)</a:t>
+            </a:r>
+          </a:p>
+          <a:p>
+            <a:r>
+              <a:rPr lang="en-US" dirty="0"/>
+              <a:t>Initial research on mRNA vaccines conducted the National Institute of Health (US)</a:t>
+            </a:r>
+          </a:p>
+          <a:p>
+            <a:r>
+              <a:rPr lang="en-US" dirty="0"/>
+              <a:t>Clinical trials (US, Germany, Turkey, Argentina, Brazil, and South Africa)</a:t>
+            </a:r>
+          </a:p>
+          <a:p>
+            <a:r>
+              <a:rPr lang="en-US" dirty="0"/>
+              <a:t>Manufacturing (Belgium, Germany, US-Michigan):</a:t>
+            </a:r>
+          </a:p>
+          <a:p>
+            <a:r>
+              <a:rPr lang="en-US" dirty="0"/>
+              <a:t>Regulatory Approvals (Worldwide): Rapid, coordinated review by UK, EU, U.S., Canada, WHO, and many others enabled global rollout.</a:t>
+            </a:r>
+          </a:p>
+        </p:txBody>
+      </p:sp>
+    </p:spTree>
+    <p:extLst>
+      <p:ext uri="{BB962C8B-B14F-4D97-AF65-F5344CB8AC3E}">
+        <p14:creationId xmlns:p14="http://schemas.microsoft.com/office/powerpoint/2010/main" val="820572588"/>
       </p:ext>
     </p:extLst>
   </p:cSld>

--- a/courses/261/vaccines.pptx
+++ b/courses/261/vaccines.pptx
@@ -5,7 +5,7 @@
     <p:sldMasterId id="2147483648" r:id="rId1"/>
   </p:sldMasterIdLst>
   <p:notesMasterIdLst>
-    <p:notesMasterId r:id="rId8"/>
+    <p:notesMasterId r:id="rId20"/>
   </p:notesMasterIdLst>
   <p:sldIdLst>
     <p:sldId id="729" r:id="rId2"/>
@@ -14,6 +14,18 @@
     <p:sldId id="264" r:id="rId5"/>
     <p:sldId id="617" r:id="rId6"/>
     <p:sldId id="735" r:id="rId7"/>
+    <p:sldId id="692" r:id="rId8"/>
+    <p:sldId id="693" r:id="rId9"/>
+    <p:sldId id="694" r:id="rId10"/>
+    <p:sldId id="673" r:id="rId11"/>
+    <p:sldId id="595" r:id="rId12"/>
+    <p:sldId id="663" r:id="rId13"/>
+    <p:sldId id="709" r:id="rId14"/>
+    <p:sldId id="257" r:id="rId15"/>
+    <p:sldId id="576" r:id="rId16"/>
+    <p:sldId id="588" r:id="rId17"/>
+    <p:sldId id="734" r:id="rId18"/>
+    <p:sldId id="724" r:id="rId19"/>
   </p:sldIdLst>
   <p:sldSz cx="12192000" cy="6858000"/>
   <p:notesSz cx="6858000" cy="9144000"/>
@@ -205,7 +217,7 @@
           <a:p>
             <a:fld id="{3C487A08-71BD-4802-BA4F-D9BAA04912EF}" type="datetimeFigureOut">
               <a:rPr lang="en-US" smtClean="0"/>
-              <a:t>11/12/2025</a:t>
+              <a:t>11/13/2025</a:t>
             </a:fld>
             <a:endParaRPr lang="en-US" dirty="0"/>
           </a:p>
@@ -556,6 +568,754 @@
 </p:notes>
 </file>
 
+<file path=ppt/notesSlides/notesSlide10.xml><?xml version="1.0" encoding="utf-8"?>
+<p:notes xmlns:a="http://schemas.openxmlformats.org/drawingml/2006/main" xmlns:r="http://schemas.openxmlformats.org/officeDocument/2006/relationships" xmlns:p="http://schemas.openxmlformats.org/presentationml/2006/main">
+  <p:cSld>
+    <p:spTree>
+      <p:nvGrpSpPr>
+        <p:cNvPr id="1" name=""/>
+        <p:cNvGrpSpPr/>
+        <p:nvPr/>
+      </p:nvGrpSpPr>
+      <p:grpSpPr>
+        <a:xfrm>
+          <a:off x="0" y="0"/>
+          <a:ext cx="0" cy="0"/>
+          <a:chOff x="0" y="0"/>
+          <a:chExt cx="0" cy="0"/>
+        </a:xfrm>
+      </p:grpSpPr>
+      <p:sp>
+        <p:nvSpPr>
+          <p:cNvPr id="2" name="Slide Image Placeholder 1"/>
+          <p:cNvSpPr>
+            <a:spLocks noGrp="1" noRot="1" noChangeAspect="1"/>
+          </p:cNvSpPr>
+          <p:nvPr>
+            <p:ph type="sldImg"/>
+          </p:nvPr>
+        </p:nvSpPr>
+        <p:spPr/>
+      </p:sp>
+      <p:sp>
+        <p:nvSpPr>
+          <p:cNvPr id="3" name="Notes Placeholder 2"/>
+          <p:cNvSpPr>
+            <a:spLocks noGrp="1"/>
+          </p:cNvSpPr>
+          <p:nvPr>
+            <p:ph type="body" idx="1"/>
+          </p:nvPr>
+        </p:nvSpPr>
+        <p:spPr/>
+        <p:txBody>
+          <a:bodyPr/>
+          <a:lstStyle/>
+          <a:p>
+            <a:r>
+              <a:rPr lang="en-US" dirty="0"/>
+              <a:t>https://www.nytimes.com/reuters/2020/09/03/world/asia/03reuters-health-coronavirus-vaccines-covax-exclusive.html</a:t>
+            </a:r>
+          </a:p>
+        </p:txBody>
+      </p:sp>
+      <p:sp>
+        <p:nvSpPr>
+          <p:cNvPr id="4" name="Slide Number Placeholder 3"/>
+          <p:cNvSpPr>
+            <a:spLocks noGrp="1"/>
+          </p:cNvSpPr>
+          <p:nvPr>
+            <p:ph type="sldNum" sz="quarter" idx="5"/>
+          </p:nvPr>
+        </p:nvSpPr>
+        <p:spPr/>
+        <p:txBody>
+          <a:bodyPr/>
+          <a:lstStyle/>
+          <a:p>
+            <a:fld id="{A81E3B35-B373-4AA8-94EE-B3E16EF9EF81}" type="slidenum">
+              <a:rPr lang="en-US" smtClean="0"/>
+              <a:pPr/>
+              <a:t>12</a:t>
+            </a:fld>
+            <a:endParaRPr lang="en-US" dirty="0"/>
+          </a:p>
+        </p:txBody>
+      </p:sp>
+    </p:spTree>
+    <p:extLst>
+      <p:ext uri="{BB962C8B-B14F-4D97-AF65-F5344CB8AC3E}">
+        <p14:creationId xmlns:p14="http://schemas.microsoft.com/office/powerpoint/2010/main" val="2761570394"/>
+      </p:ext>
+    </p:extLst>
+  </p:cSld>
+  <p:clrMapOvr>
+    <a:masterClrMapping/>
+  </p:clrMapOvr>
+</p:notes>
+</file>
+
+<file path=ppt/notesSlides/notesSlide11.xml><?xml version="1.0" encoding="utf-8"?>
+<p:notes xmlns:a="http://schemas.openxmlformats.org/drawingml/2006/main" xmlns:r="http://schemas.openxmlformats.org/officeDocument/2006/relationships" xmlns:p="http://schemas.openxmlformats.org/presentationml/2006/main">
+  <p:cSld>
+    <p:spTree>
+      <p:nvGrpSpPr>
+        <p:cNvPr id="1" name=""/>
+        <p:cNvGrpSpPr/>
+        <p:nvPr/>
+      </p:nvGrpSpPr>
+      <p:grpSpPr>
+        <a:xfrm>
+          <a:off x="0" y="0"/>
+          <a:ext cx="0" cy="0"/>
+          <a:chOff x="0" y="0"/>
+          <a:chExt cx="0" cy="0"/>
+        </a:xfrm>
+      </p:grpSpPr>
+      <p:sp>
+        <p:nvSpPr>
+          <p:cNvPr id="2" name="Slide Image Placeholder 1"/>
+          <p:cNvSpPr>
+            <a:spLocks noGrp="1" noRot="1" noChangeAspect="1"/>
+          </p:cNvSpPr>
+          <p:nvPr>
+            <p:ph type="sldImg"/>
+          </p:nvPr>
+        </p:nvSpPr>
+        <p:spPr/>
+      </p:sp>
+      <p:sp>
+        <p:nvSpPr>
+          <p:cNvPr id="3" name="Notes Placeholder 2"/>
+          <p:cNvSpPr>
+            <a:spLocks noGrp="1"/>
+          </p:cNvSpPr>
+          <p:nvPr>
+            <p:ph type="body" idx="1"/>
+          </p:nvPr>
+        </p:nvSpPr>
+        <p:spPr/>
+        <p:txBody>
+          <a:bodyPr/>
+          <a:lstStyle/>
+          <a:p>
+            <a:r>
+              <a:rPr lang="en-US" dirty="0"/>
+              <a:t>Low- and middle-income nations would have had lower death rates if vaccines had been shared more equitably. </a:t>
+            </a:r>
+            <a:br>
+              <a:rPr lang="en-US" dirty="0"/>
+            </a:br>
+            <a:br>
+              <a:rPr lang="en-US" dirty="0"/>
+            </a:br>
+            <a:r>
+              <a:rPr lang="en-US" dirty="0"/>
+              <a:t>Equitable vaccine coverage could have prevented 1.3 million deaths worldwide. More than twice that many deaths would have been avoided if higher-income countries had also stuck with other measures to reduce transmission.</a:t>
+            </a:r>
+            <a:br>
+              <a:rPr lang="en-US" dirty="0"/>
+            </a:br>
+            <a:br>
+              <a:rPr lang="en-US" dirty="0"/>
+            </a:br>
+            <a:r>
+              <a:rPr lang="en-US" dirty="0"/>
+              <a:t>https://www.nature.com/articles/d41586-022-03529-3</a:t>
+            </a:r>
+          </a:p>
+        </p:txBody>
+      </p:sp>
+      <p:sp>
+        <p:nvSpPr>
+          <p:cNvPr id="4" name="Slide Number Placeholder 3"/>
+          <p:cNvSpPr>
+            <a:spLocks noGrp="1"/>
+          </p:cNvSpPr>
+          <p:nvPr>
+            <p:ph type="sldNum" sz="quarter" idx="5"/>
+          </p:nvPr>
+        </p:nvSpPr>
+        <p:spPr/>
+        <p:txBody>
+          <a:bodyPr/>
+          <a:lstStyle/>
+          <a:p>
+            <a:fld id="{6DC9E9FF-7C85-4017-A0E8-7596D2FE69B9}" type="slidenum">
+              <a:rPr lang="en-US" smtClean="0"/>
+              <a:t>13</a:t>
+            </a:fld>
+            <a:endParaRPr lang="en-US" dirty="0"/>
+          </a:p>
+        </p:txBody>
+      </p:sp>
+    </p:spTree>
+    <p:extLst>
+      <p:ext uri="{BB962C8B-B14F-4D97-AF65-F5344CB8AC3E}">
+        <p14:creationId xmlns:p14="http://schemas.microsoft.com/office/powerpoint/2010/main" val="174281388"/>
+      </p:ext>
+    </p:extLst>
+  </p:cSld>
+  <p:clrMapOvr>
+    <a:masterClrMapping/>
+  </p:clrMapOvr>
+</p:notes>
+</file>
+
+<file path=ppt/notesSlides/notesSlide12.xml><?xml version="1.0" encoding="utf-8"?>
+<p:notes xmlns:a="http://schemas.openxmlformats.org/drawingml/2006/main" xmlns:r="http://schemas.openxmlformats.org/officeDocument/2006/relationships" xmlns:p="http://schemas.openxmlformats.org/presentationml/2006/main">
+  <p:cSld>
+    <p:spTree>
+      <p:nvGrpSpPr>
+        <p:cNvPr id="1" name=""/>
+        <p:cNvGrpSpPr/>
+        <p:nvPr/>
+      </p:nvGrpSpPr>
+      <p:grpSpPr>
+        <a:xfrm>
+          <a:off x="0" y="0"/>
+          <a:ext cx="0" cy="0"/>
+          <a:chOff x="0" y="0"/>
+          <a:chExt cx="0" cy="0"/>
+        </a:xfrm>
+      </p:grpSpPr>
+      <p:sp>
+        <p:nvSpPr>
+          <p:cNvPr id="2" name="Slide Image Placeholder 1"/>
+          <p:cNvSpPr>
+            <a:spLocks noGrp="1" noRot="1" noChangeAspect="1"/>
+          </p:cNvSpPr>
+          <p:nvPr>
+            <p:ph type="sldImg"/>
+          </p:nvPr>
+        </p:nvSpPr>
+        <p:spPr/>
+      </p:sp>
+      <p:sp>
+        <p:nvSpPr>
+          <p:cNvPr id="3" name="Notes Placeholder 2"/>
+          <p:cNvSpPr>
+            <a:spLocks noGrp="1"/>
+          </p:cNvSpPr>
+          <p:nvPr>
+            <p:ph type="body" idx="1"/>
+          </p:nvPr>
+        </p:nvSpPr>
+        <p:spPr/>
+        <p:txBody>
+          <a:bodyPr/>
+          <a:lstStyle/>
+          <a:p>
+            <a:pPr marL="0" marR="0" lvl="0" indent="0" algn="l" defTabSz="914400" rtl="0" eaLnBrk="1" fontAlgn="auto" latinLnBrk="0" hangingPunct="1">
+              <a:lnSpc>
+                <a:spcPct val="100000"/>
+              </a:lnSpc>
+              <a:spcBef>
+                <a:spcPts val="0"/>
+              </a:spcBef>
+              <a:spcAft>
+                <a:spcPts val="0"/>
+              </a:spcAft>
+              <a:buClrTx/>
+              <a:buSzTx/>
+              <a:buFontTx/>
+              <a:buNone/>
+              <a:tabLst/>
+              <a:defRPr/>
+            </a:pPr>
+            <a:r>
+              <a:rPr lang="en-US" sz="1200" b="0" i="0" u="none" strike="noStrike" baseline="0" dirty="0">
+                <a:solidFill>
+                  <a:srgbClr val="000000"/>
+                </a:solidFill>
+                <a:latin typeface="Shaker 2 Lancet"/>
+              </a:rPr>
+              <a:t>One such approach that is to waive patent protections so that new mRNA vaccines can be manufactured in other countries, lessening the dependence upon wealthier nations to provide them</a:t>
+            </a:r>
+          </a:p>
+          <a:p>
+            <a:pPr marL="0" marR="0" lvl="0" indent="0" algn="l" defTabSz="914400" rtl="0" eaLnBrk="1" fontAlgn="auto" latinLnBrk="0" hangingPunct="1">
+              <a:lnSpc>
+                <a:spcPct val="100000"/>
+              </a:lnSpc>
+              <a:spcBef>
+                <a:spcPts val="0"/>
+              </a:spcBef>
+              <a:spcAft>
+                <a:spcPts val="0"/>
+              </a:spcAft>
+              <a:buClrTx/>
+              <a:buSzTx/>
+              <a:buFontTx/>
+              <a:buNone/>
+              <a:tabLst/>
+              <a:defRPr/>
+            </a:pPr>
+            <a:endParaRPr lang="en-US" sz="1200" b="0" i="0" u="none" strike="noStrike" baseline="0" dirty="0">
+              <a:solidFill>
+                <a:srgbClr val="000000"/>
+              </a:solidFill>
+              <a:latin typeface="Shaker 2 Lancet"/>
+            </a:endParaRPr>
+          </a:p>
+          <a:p>
+            <a:pPr marL="0" marR="0" lvl="0" indent="0" algn="l" defTabSz="914400" rtl="0" eaLnBrk="1" fontAlgn="auto" latinLnBrk="0" hangingPunct="1">
+              <a:lnSpc>
+                <a:spcPct val="100000"/>
+              </a:lnSpc>
+              <a:spcBef>
+                <a:spcPts val="0"/>
+              </a:spcBef>
+              <a:spcAft>
+                <a:spcPts val="0"/>
+              </a:spcAft>
+              <a:buClrTx/>
+              <a:buSzTx/>
+              <a:buFontTx/>
+              <a:buNone/>
+              <a:tabLst/>
+              <a:defRPr/>
+            </a:pPr>
+            <a:r>
+              <a:rPr lang="en-US" dirty="0"/>
+              <a:t>Releasing patents on COVID vaccines would likely have increased global vaccination rates, especially in low- and middle-income countries, by enabling local production, lowering costs, and reducing dependence on international supply chains. Patent restrictions limited vaccine availability by concentrating production in a few countries, making doses less accessible and more costly for many nations. Local manufacturing could have met demand faster and reduced logistical challenges associated with vaccine distribution. While concerns about quality control and innovation incentives exist, many argue that, given the public health stakes and public funding in vaccine development, global access should have been prioritized.</a:t>
+            </a:r>
+          </a:p>
+          <a:p>
+            <a:endParaRPr lang="en-US" dirty="0"/>
+          </a:p>
+        </p:txBody>
+      </p:sp>
+      <p:sp>
+        <p:nvSpPr>
+          <p:cNvPr id="4" name="Slide Number Placeholder 3"/>
+          <p:cNvSpPr>
+            <a:spLocks noGrp="1"/>
+          </p:cNvSpPr>
+          <p:nvPr>
+            <p:ph type="sldNum" sz="quarter" idx="5"/>
+          </p:nvPr>
+        </p:nvSpPr>
+        <p:spPr/>
+        <p:txBody>
+          <a:bodyPr/>
+          <a:lstStyle/>
+          <a:p>
+            <a:fld id="{6DC9E9FF-7C85-4017-A0E8-7596D2FE69B9}" type="slidenum">
+              <a:rPr lang="en-US" smtClean="0"/>
+              <a:t>14</a:t>
+            </a:fld>
+            <a:endParaRPr lang="en-US" dirty="0"/>
+          </a:p>
+        </p:txBody>
+      </p:sp>
+    </p:spTree>
+    <p:extLst>
+      <p:ext uri="{BB962C8B-B14F-4D97-AF65-F5344CB8AC3E}">
+        <p14:creationId xmlns:p14="http://schemas.microsoft.com/office/powerpoint/2010/main" val="3993485629"/>
+      </p:ext>
+    </p:extLst>
+  </p:cSld>
+  <p:clrMapOvr>
+    <a:masterClrMapping/>
+  </p:clrMapOvr>
+</p:notes>
+</file>
+
+<file path=ppt/notesSlides/notesSlide13.xml><?xml version="1.0" encoding="utf-8"?>
+<p:notes xmlns:a="http://schemas.openxmlformats.org/drawingml/2006/main" xmlns:r="http://schemas.openxmlformats.org/officeDocument/2006/relationships" xmlns:p="http://schemas.openxmlformats.org/presentationml/2006/main">
+  <p:cSld>
+    <p:spTree>
+      <p:nvGrpSpPr>
+        <p:cNvPr id="1" name=""/>
+        <p:cNvGrpSpPr/>
+        <p:nvPr/>
+      </p:nvGrpSpPr>
+      <p:grpSpPr>
+        <a:xfrm>
+          <a:off x="0" y="0"/>
+          <a:ext cx="0" cy="0"/>
+          <a:chOff x="0" y="0"/>
+          <a:chExt cx="0" cy="0"/>
+        </a:xfrm>
+      </p:grpSpPr>
+      <p:sp>
+        <p:nvSpPr>
+          <p:cNvPr id="2" name="Slide Image Placeholder 1"/>
+          <p:cNvSpPr>
+            <a:spLocks noGrp="1" noRot="1" noChangeAspect="1"/>
+          </p:cNvSpPr>
+          <p:nvPr>
+            <p:ph type="sldImg"/>
+          </p:nvPr>
+        </p:nvSpPr>
+        <p:spPr/>
+      </p:sp>
+      <p:sp>
+        <p:nvSpPr>
+          <p:cNvPr id="3" name="Notes Placeholder 2"/>
+          <p:cNvSpPr>
+            <a:spLocks noGrp="1"/>
+          </p:cNvSpPr>
+          <p:nvPr>
+            <p:ph type="body" idx="1"/>
+          </p:nvPr>
+        </p:nvSpPr>
+        <p:spPr/>
+        <p:txBody>
+          <a:bodyPr/>
+          <a:lstStyle/>
+          <a:p>
+            <a:r>
+              <a:rPr lang="en-US" dirty="0"/>
+              <a:t>https://www.washingtonpost.com/graphics/2020/health/covid-vaccine-update-coronavirus/</a:t>
+            </a:r>
+          </a:p>
+        </p:txBody>
+      </p:sp>
+      <p:sp>
+        <p:nvSpPr>
+          <p:cNvPr id="4" name="Slide Number Placeholder 3"/>
+          <p:cNvSpPr>
+            <a:spLocks noGrp="1"/>
+          </p:cNvSpPr>
+          <p:nvPr>
+            <p:ph type="sldNum" sz="quarter" idx="5"/>
+          </p:nvPr>
+        </p:nvSpPr>
+        <p:spPr/>
+        <p:txBody>
+          <a:bodyPr/>
+          <a:lstStyle/>
+          <a:p>
+            <a:fld id="{6DC9E9FF-7C85-4017-A0E8-7596D2FE69B9}" type="slidenum">
+              <a:rPr lang="en-US" smtClean="0"/>
+              <a:t>15</a:t>
+            </a:fld>
+            <a:endParaRPr lang="en-US" dirty="0"/>
+          </a:p>
+        </p:txBody>
+      </p:sp>
+    </p:spTree>
+    <p:extLst>
+      <p:ext uri="{BB962C8B-B14F-4D97-AF65-F5344CB8AC3E}">
+        <p14:creationId xmlns:p14="http://schemas.microsoft.com/office/powerpoint/2010/main" val="1025731877"/>
+      </p:ext>
+    </p:extLst>
+  </p:cSld>
+  <p:clrMapOvr>
+    <a:masterClrMapping/>
+  </p:clrMapOvr>
+</p:notes>
+</file>
+
+<file path=ppt/notesSlides/notesSlide14.xml><?xml version="1.0" encoding="utf-8"?>
+<p:notes xmlns:a="http://schemas.openxmlformats.org/drawingml/2006/main" xmlns:r="http://schemas.openxmlformats.org/officeDocument/2006/relationships" xmlns:p="http://schemas.openxmlformats.org/presentationml/2006/main">
+  <p:cSld>
+    <p:spTree>
+      <p:nvGrpSpPr>
+        <p:cNvPr id="1" name=""/>
+        <p:cNvGrpSpPr/>
+        <p:nvPr/>
+      </p:nvGrpSpPr>
+      <p:grpSpPr>
+        <a:xfrm>
+          <a:off x="0" y="0"/>
+          <a:ext cx="0" cy="0"/>
+          <a:chOff x="0" y="0"/>
+          <a:chExt cx="0" cy="0"/>
+        </a:xfrm>
+      </p:grpSpPr>
+      <p:sp>
+        <p:nvSpPr>
+          <p:cNvPr id="2" name="Slide Image Placeholder 1"/>
+          <p:cNvSpPr>
+            <a:spLocks noGrp="1" noRot="1" noChangeAspect="1"/>
+          </p:cNvSpPr>
+          <p:nvPr>
+            <p:ph type="sldImg"/>
+          </p:nvPr>
+        </p:nvSpPr>
+        <p:spPr/>
+      </p:sp>
+      <p:sp>
+        <p:nvSpPr>
+          <p:cNvPr id="3" name="Notes Placeholder 2"/>
+          <p:cNvSpPr>
+            <a:spLocks noGrp="1"/>
+          </p:cNvSpPr>
+          <p:nvPr>
+            <p:ph type="body" idx="1"/>
+          </p:nvPr>
+        </p:nvSpPr>
+        <p:spPr/>
+        <p:txBody>
+          <a:bodyPr/>
+          <a:lstStyle/>
+          <a:p>
+            <a:r>
+              <a:rPr lang="en-US" dirty="0"/>
+              <a:t>https://www.nytimes.com/2020/11/10/business/biontech-covid-vaccine.html</a:t>
+            </a:r>
+            <a:br>
+              <a:rPr lang="en-US" dirty="0"/>
+            </a:br>
+            <a:br>
+              <a:rPr lang="en-US" dirty="0"/>
+            </a:br>
+            <a:r>
+              <a:rPr lang="en-US" dirty="0"/>
+              <a:t>BioNTech coordinated the development of their mRNA vaccine with Pfizer, an American company</a:t>
+            </a:r>
+          </a:p>
+          <a:p>
+            <a:endParaRPr lang="en-US" dirty="0"/>
+          </a:p>
+          <a:p>
+            <a:r>
+              <a:rPr lang="en-US" dirty="0"/>
+              <a:t>BioNTech was co-founded by Dr. Uğur Şahin and Dr. Özlem Türeci, a married couple of Turkish descent. Dr. Şahin was born in İskenderun, Turkey, and moved to Germany at the age of four to join his father, who worked at a Ford factory in Cologne. Dr. Türeci was born in Germany to a Turkish physician who had immigrated from Istanbul. Together, they established BioNTech in 2008, focusing on individualized cancer immunotherapy and later developing one of the first COVID-19 vaccines. </a:t>
+            </a:r>
+          </a:p>
+        </p:txBody>
+      </p:sp>
+      <p:sp>
+        <p:nvSpPr>
+          <p:cNvPr id="4" name="Slide Number Placeholder 3"/>
+          <p:cNvSpPr>
+            <a:spLocks noGrp="1"/>
+          </p:cNvSpPr>
+          <p:nvPr>
+            <p:ph type="sldNum" sz="quarter" idx="5"/>
+          </p:nvPr>
+        </p:nvSpPr>
+        <p:spPr/>
+        <p:txBody>
+          <a:bodyPr/>
+          <a:lstStyle/>
+          <a:p>
+            <a:fld id="{6DC9E9FF-7C85-4017-A0E8-7596D2FE69B9}" type="slidenum">
+              <a:rPr lang="en-US" smtClean="0"/>
+              <a:t>16</a:t>
+            </a:fld>
+            <a:endParaRPr lang="en-US" dirty="0"/>
+          </a:p>
+        </p:txBody>
+      </p:sp>
+    </p:spTree>
+    <p:extLst>
+      <p:ext uri="{BB962C8B-B14F-4D97-AF65-F5344CB8AC3E}">
+        <p14:creationId xmlns:p14="http://schemas.microsoft.com/office/powerpoint/2010/main" val="2179837321"/>
+      </p:ext>
+    </p:extLst>
+  </p:cSld>
+  <p:clrMapOvr>
+    <a:masterClrMapping/>
+  </p:clrMapOvr>
+</p:notes>
+</file>
+
+<file path=ppt/notesSlides/notesSlide15.xml><?xml version="1.0" encoding="utf-8"?>
+<p:notes xmlns:a="http://schemas.openxmlformats.org/drawingml/2006/main" xmlns:r="http://schemas.openxmlformats.org/officeDocument/2006/relationships" xmlns:p="http://schemas.openxmlformats.org/presentationml/2006/main">
+  <p:cSld>
+    <p:spTree>
+      <p:nvGrpSpPr>
+        <p:cNvPr id="1" name=""/>
+        <p:cNvGrpSpPr/>
+        <p:nvPr/>
+      </p:nvGrpSpPr>
+      <p:grpSpPr>
+        <a:xfrm>
+          <a:off x="0" y="0"/>
+          <a:ext cx="0" cy="0"/>
+          <a:chOff x="0" y="0"/>
+          <a:chExt cx="0" cy="0"/>
+        </a:xfrm>
+      </p:grpSpPr>
+      <p:sp>
+        <p:nvSpPr>
+          <p:cNvPr id="2" name="Slide Image Placeholder 1"/>
+          <p:cNvSpPr>
+            <a:spLocks noGrp="1" noRot="1" noChangeAspect="1"/>
+          </p:cNvSpPr>
+          <p:nvPr>
+            <p:ph type="sldImg"/>
+          </p:nvPr>
+        </p:nvSpPr>
+        <p:spPr/>
+      </p:sp>
+      <p:sp>
+        <p:nvSpPr>
+          <p:cNvPr id="3" name="Notes Placeholder 2"/>
+          <p:cNvSpPr>
+            <a:spLocks noGrp="1"/>
+          </p:cNvSpPr>
+          <p:nvPr>
+            <p:ph type="body" idx="1"/>
+          </p:nvPr>
+        </p:nvSpPr>
+        <p:spPr/>
+        <p:txBody>
+          <a:bodyPr/>
+          <a:lstStyle/>
+          <a:p>
+            <a:endParaRPr lang="en-US" dirty="0"/>
+          </a:p>
+        </p:txBody>
+      </p:sp>
+      <p:sp>
+        <p:nvSpPr>
+          <p:cNvPr id="4" name="Slide Number Placeholder 3"/>
+          <p:cNvSpPr>
+            <a:spLocks noGrp="1"/>
+          </p:cNvSpPr>
+          <p:nvPr>
+            <p:ph type="sldNum" sz="quarter" idx="5"/>
+          </p:nvPr>
+        </p:nvSpPr>
+        <p:spPr/>
+        <p:txBody>
+          <a:bodyPr/>
+          <a:lstStyle/>
+          <a:p>
+            <a:fld id="{6DC9E9FF-7C85-4017-A0E8-7596D2FE69B9}" type="slidenum">
+              <a:rPr lang="en-US" smtClean="0"/>
+              <a:t>17</a:t>
+            </a:fld>
+            <a:endParaRPr lang="en-US" dirty="0"/>
+          </a:p>
+        </p:txBody>
+      </p:sp>
+    </p:spTree>
+    <p:extLst>
+      <p:ext uri="{BB962C8B-B14F-4D97-AF65-F5344CB8AC3E}">
+        <p14:creationId xmlns:p14="http://schemas.microsoft.com/office/powerpoint/2010/main" val="633844117"/>
+      </p:ext>
+    </p:extLst>
+  </p:cSld>
+  <p:clrMapOvr>
+    <a:masterClrMapping/>
+  </p:clrMapOvr>
+</p:notes>
+</file>
+
+<file path=ppt/notesSlides/notesSlide16.xml><?xml version="1.0" encoding="utf-8"?>
+<p:notes xmlns:a="http://schemas.openxmlformats.org/drawingml/2006/main" xmlns:r="http://schemas.openxmlformats.org/officeDocument/2006/relationships" xmlns:p="http://schemas.openxmlformats.org/presentationml/2006/main">
+  <p:cSld>
+    <p:spTree>
+      <p:nvGrpSpPr>
+        <p:cNvPr id="1" name=""/>
+        <p:cNvGrpSpPr/>
+        <p:nvPr/>
+      </p:nvGrpSpPr>
+      <p:grpSpPr>
+        <a:xfrm>
+          <a:off x="0" y="0"/>
+          <a:ext cx="0" cy="0"/>
+          <a:chOff x="0" y="0"/>
+          <a:chExt cx="0" cy="0"/>
+        </a:xfrm>
+      </p:grpSpPr>
+      <p:sp>
+        <p:nvSpPr>
+          <p:cNvPr id="2" name="Slide Image Placeholder 1"/>
+          <p:cNvSpPr>
+            <a:spLocks noGrp="1" noRot="1" noChangeAspect="1"/>
+          </p:cNvSpPr>
+          <p:nvPr>
+            <p:ph type="sldImg"/>
+          </p:nvPr>
+        </p:nvSpPr>
+        <p:spPr/>
+      </p:sp>
+      <p:sp>
+        <p:nvSpPr>
+          <p:cNvPr id="3" name="Notes Placeholder 2"/>
+          <p:cNvSpPr>
+            <a:spLocks noGrp="1"/>
+          </p:cNvSpPr>
+          <p:nvPr>
+            <p:ph type="body" idx="1"/>
+          </p:nvPr>
+        </p:nvSpPr>
+        <p:spPr/>
+        <p:txBody>
+          <a:bodyPr/>
+          <a:lstStyle/>
+          <a:p>
+            <a:r>
+              <a:rPr lang="en-US" dirty="0"/>
+              <a:t>https://www.nytimes.com/2025/08/05/health/rfk-jr-vaccine-funding.html</a:t>
+            </a:r>
+          </a:p>
+          <a:p>
+            <a:endParaRPr lang="en-US" dirty="0"/>
+          </a:p>
+          <a:p>
+            <a:pPr marL="0" marR="0" lvl="0" indent="0" algn="l" defTabSz="914400" rtl="0" eaLnBrk="1" fontAlgn="auto" latinLnBrk="0" hangingPunct="1">
+              <a:lnSpc>
+                <a:spcPct val="100000"/>
+              </a:lnSpc>
+              <a:spcBef>
+                <a:spcPts val="0"/>
+              </a:spcBef>
+              <a:spcAft>
+                <a:spcPts val="0"/>
+              </a:spcAft>
+              <a:buClrTx/>
+              <a:buSzTx/>
+              <a:buFontTx/>
+              <a:buNone/>
+              <a:tabLst/>
+              <a:defRPr/>
+            </a:pPr>
+            <a:r>
+              <a:rPr lang="en-US" dirty="0"/>
+              <a:t>mRNA shots instruct the body to produce a fragment of a virus, which then sets off the body’s immune response</a:t>
+            </a:r>
+          </a:p>
+          <a:p>
+            <a:endParaRPr lang="en-US" dirty="0"/>
+          </a:p>
+        </p:txBody>
+      </p:sp>
+      <p:sp>
+        <p:nvSpPr>
+          <p:cNvPr id="4" name="Slide Number Placeholder 3"/>
+          <p:cNvSpPr>
+            <a:spLocks noGrp="1"/>
+          </p:cNvSpPr>
+          <p:nvPr>
+            <p:ph type="sldNum" sz="quarter" idx="5"/>
+          </p:nvPr>
+        </p:nvSpPr>
+        <p:spPr/>
+        <p:txBody>
+          <a:bodyPr/>
+          <a:lstStyle/>
+          <a:p>
+            <a:fld id="{6DC9E9FF-7C85-4017-A0E8-7596D2FE69B9}" type="slidenum">
+              <a:rPr lang="en-US" smtClean="0"/>
+              <a:t>18</a:t>
+            </a:fld>
+            <a:endParaRPr lang="en-US" dirty="0"/>
+          </a:p>
+        </p:txBody>
+      </p:sp>
+    </p:spTree>
+    <p:extLst>
+      <p:ext uri="{BB962C8B-B14F-4D97-AF65-F5344CB8AC3E}">
+        <p14:creationId xmlns:p14="http://schemas.microsoft.com/office/powerpoint/2010/main" val="1688406755"/>
+      </p:ext>
+    </p:extLst>
+  </p:cSld>
+  <p:clrMapOvr>
+    <a:masterClrMapping/>
+  </p:clrMapOvr>
+</p:notes>
+</file>
+
 <file path=ppt/notesSlides/notesSlide2.xml><?xml version="1.0" encoding="utf-8"?>
 <p:notes xmlns:a="http://schemas.openxmlformats.org/drawingml/2006/main" xmlns:r="http://schemas.openxmlformats.org/officeDocument/2006/relationships" xmlns:p="http://schemas.openxmlformats.org/presentationml/2006/main">
   <p:cSld>
@@ -867,6 +1627,606 @@
     <p:extLst>
       <p:ext uri="{BB962C8B-B14F-4D97-AF65-F5344CB8AC3E}">
         <p14:creationId xmlns:p14="http://schemas.microsoft.com/office/powerpoint/2010/main" val="2697817967"/>
+      </p:ext>
+    </p:extLst>
+  </p:cSld>
+  <p:clrMapOvr>
+    <a:masterClrMapping/>
+  </p:clrMapOvr>
+</p:notes>
+</file>
+
+<file path=ppt/notesSlides/notesSlide5.xml><?xml version="1.0" encoding="utf-8"?>
+<p:notes xmlns:a="http://schemas.openxmlformats.org/drawingml/2006/main" xmlns:r="http://schemas.openxmlformats.org/officeDocument/2006/relationships" xmlns:p="http://schemas.openxmlformats.org/presentationml/2006/main">
+  <p:cSld>
+    <p:spTree>
+      <p:nvGrpSpPr>
+        <p:cNvPr id="1" name=""/>
+        <p:cNvGrpSpPr/>
+        <p:nvPr/>
+      </p:nvGrpSpPr>
+      <p:grpSpPr>
+        <a:xfrm>
+          <a:off x="0" y="0"/>
+          <a:ext cx="0" cy="0"/>
+          <a:chOff x="0" y="0"/>
+          <a:chExt cx="0" cy="0"/>
+        </a:xfrm>
+      </p:grpSpPr>
+      <p:sp>
+        <p:nvSpPr>
+          <p:cNvPr id="2" name="Slide Image Placeholder 1"/>
+          <p:cNvSpPr>
+            <a:spLocks noGrp="1" noRot="1" noChangeAspect="1"/>
+          </p:cNvSpPr>
+          <p:nvPr>
+            <p:ph type="sldImg"/>
+          </p:nvPr>
+        </p:nvSpPr>
+        <p:spPr/>
+      </p:sp>
+      <p:sp>
+        <p:nvSpPr>
+          <p:cNvPr id="3" name="Notes Placeholder 2"/>
+          <p:cNvSpPr>
+            <a:spLocks noGrp="1"/>
+          </p:cNvSpPr>
+          <p:nvPr>
+            <p:ph type="body" idx="1"/>
+          </p:nvPr>
+        </p:nvSpPr>
+        <p:spPr/>
+        <p:txBody>
+          <a:bodyPr/>
+          <a:lstStyle/>
+          <a:p>
+            <a:r>
+              <a:rPr lang="en-US" dirty="0"/>
+              <a:t>Berkley, S. "Vaccination lags behind in middle-income countries." </a:t>
+            </a:r>
+            <a:r>
+              <a:rPr lang="en-US" i="1" dirty="0"/>
+              <a:t>Nature</a:t>
+            </a:r>
+            <a:r>
+              <a:rPr lang="en-US" dirty="0"/>
+              <a:t> 569.7756 (2019): 309.</a:t>
+            </a:r>
+            <a:br>
+              <a:rPr lang="en-US" dirty="0"/>
+            </a:br>
+            <a:br>
+              <a:rPr lang="en-US" dirty="0"/>
+            </a:br>
+            <a:r>
+              <a:rPr lang="en-US" dirty="0"/>
+              <a:t>Global Alliance for Vaccines and Immunization</a:t>
+            </a:r>
+          </a:p>
+          <a:p>
+            <a:endParaRPr lang="en-US" dirty="0"/>
+          </a:p>
+          <a:p>
+            <a:r>
+              <a:rPr lang="en-US" dirty="0"/>
+              <a:t>https://www.gavi.org/</a:t>
+            </a:r>
+          </a:p>
+        </p:txBody>
+      </p:sp>
+      <p:sp>
+        <p:nvSpPr>
+          <p:cNvPr id="4" name="Slide Number Placeholder 3"/>
+          <p:cNvSpPr>
+            <a:spLocks noGrp="1"/>
+          </p:cNvSpPr>
+          <p:nvPr>
+            <p:ph type="sldNum" sz="quarter" idx="10"/>
+          </p:nvPr>
+        </p:nvSpPr>
+        <p:spPr/>
+        <p:txBody>
+          <a:bodyPr/>
+          <a:lstStyle/>
+          <a:p>
+            <a:fld id="{6DC9E9FF-7C85-4017-A0E8-7596D2FE69B9}" type="slidenum">
+              <a:rPr lang="en-US" smtClean="0"/>
+              <a:t>7</a:t>
+            </a:fld>
+            <a:endParaRPr lang="en-US" dirty="0"/>
+          </a:p>
+        </p:txBody>
+      </p:sp>
+    </p:spTree>
+    <p:extLst>
+      <p:ext uri="{BB962C8B-B14F-4D97-AF65-F5344CB8AC3E}">
+        <p14:creationId xmlns:p14="http://schemas.microsoft.com/office/powerpoint/2010/main" val="1625033251"/>
+      </p:ext>
+    </p:extLst>
+  </p:cSld>
+  <p:clrMapOvr>
+    <a:masterClrMapping/>
+  </p:clrMapOvr>
+</p:notes>
+</file>
+
+<file path=ppt/notesSlides/notesSlide6.xml><?xml version="1.0" encoding="utf-8"?>
+<p:notes xmlns:a="http://schemas.openxmlformats.org/drawingml/2006/main" xmlns:r="http://schemas.openxmlformats.org/officeDocument/2006/relationships" xmlns:p="http://schemas.openxmlformats.org/presentationml/2006/main">
+  <p:cSld>
+    <p:spTree>
+      <p:nvGrpSpPr>
+        <p:cNvPr id="1" name=""/>
+        <p:cNvGrpSpPr/>
+        <p:nvPr/>
+      </p:nvGrpSpPr>
+      <p:grpSpPr>
+        <a:xfrm>
+          <a:off x="0" y="0"/>
+          <a:ext cx="0" cy="0"/>
+          <a:chOff x="0" y="0"/>
+          <a:chExt cx="0" cy="0"/>
+        </a:xfrm>
+      </p:grpSpPr>
+      <p:sp>
+        <p:nvSpPr>
+          <p:cNvPr id="2" name="Slide Image Placeholder 1"/>
+          <p:cNvSpPr>
+            <a:spLocks noGrp="1" noRot="1" noChangeAspect="1"/>
+          </p:cNvSpPr>
+          <p:nvPr>
+            <p:ph type="sldImg"/>
+          </p:nvPr>
+        </p:nvSpPr>
+        <p:spPr/>
+      </p:sp>
+      <p:sp>
+        <p:nvSpPr>
+          <p:cNvPr id="3" name="Notes Placeholder 2"/>
+          <p:cNvSpPr>
+            <a:spLocks noGrp="1"/>
+          </p:cNvSpPr>
+          <p:nvPr>
+            <p:ph type="body" idx="1"/>
+          </p:nvPr>
+        </p:nvSpPr>
+        <p:spPr/>
+        <p:txBody>
+          <a:bodyPr/>
+          <a:lstStyle/>
+          <a:p>
+            <a:r>
+              <a:rPr lang="en-US" dirty="0"/>
+              <a:t>https://www.cytivalifesciences.com/en/us/shop</a:t>
+            </a:r>
+          </a:p>
+        </p:txBody>
+      </p:sp>
+      <p:sp>
+        <p:nvSpPr>
+          <p:cNvPr id="4" name="Slide Number Placeholder 3"/>
+          <p:cNvSpPr>
+            <a:spLocks noGrp="1"/>
+          </p:cNvSpPr>
+          <p:nvPr>
+            <p:ph type="sldNum" sz="quarter" idx="5"/>
+          </p:nvPr>
+        </p:nvSpPr>
+        <p:spPr/>
+        <p:txBody>
+          <a:bodyPr/>
+          <a:lstStyle/>
+          <a:p>
+            <a:fld id="{A07A47B8-78DC-4F69-889B-268DA05B03C5}" type="slidenum">
+              <a:rPr lang="en-US" smtClean="0"/>
+              <a:t>8</a:t>
+            </a:fld>
+            <a:endParaRPr lang="en-US" dirty="0"/>
+          </a:p>
+        </p:txBody>
+      </p:sp>
+    </p:spTree>
+    <p:extLst>
+      <p:ext uri="{BB962C8B-B14F-4D97-AF65-F5344CB8AC3E}">
+        <p14:creationId xmlns:p14="http://schemas.microsoft.com/office/powerpoint/2010/main" val="2306988314"/>
+      </p:ext>
+    </p:extLst>
+  </p:cSld>
+  <p:clrMapOvr>
+    <a:masterClrMapping/>
+  </p:clrMapOvr>
+</p:notes>
+</file>
+
+<file path=ppt/notesSlides/notesSlide7.xml><?xml version="1.0" encoding="utf-8"?>
+<p:notes xmlns:a="http://schemas.openxmlformats.org/drawingml/2006/main" xmlns:r="http://schemas.openxmlformats.org/officeDocument/2006/relationships" xmlns:p="http://schemas.openxmlformats.org/presentationml/2006/main">
+  <p:cSld>
+    <p:spTree>
+      <p:nvGrpSpPr>
+        <p:cNvPr id="1" name=""/>
+        <p:cNvGrpSpPr/>
+        <p:nvPr/>
+      </p:nvGrpSpPr>
+      <p:grpSpPr>
+        <a:xfrm>
+          <a:off x="0" y="0"/>
+          <a:ext cx="0" cy="0"/>
+          <a:chOff x="0" y="0"/>
+          <a:chExt cx="0" cy="0"/>
+        </a:xfrm>
+      </p:grpSpPr>
+      <p:sp>
+        <p:nvSpPr>
+          <p:cNvPr id="2" name="Slide Image Placeholder 1"/>
+          <p:cNvSpPr>
+            <a:spLocks noGrp="1" noRot="1" noChangeAspect="1"/>
+          </p:cNvSpPr>
+          <p:nvPr>
+            <p:ph type="sldImg"/>
+          </p:nvPr>
+        </p:nvSpPr>
+        <p:spPr/>
+      </p:sp>
+      <p:sp>
+        <p:nvSpPr>
+          <p:cNvPr id="3" name="Notes Placeholder 2"/>
+          <p:cNvSpPr>
+            <a:spLocks noGrp="1"/>
+          </p:cNvSpPr>
+          <p:nvPr>
+            <p:ph type="body" idx="1"/>
+          </p:nvPr>
+        </p:nvSpPr>
+        <p:spPr/>
+        <p:txBody>
+          <a:bodyPr/>
+          <a:lstStyle/>
+          <a:p>
+            <a:pPr marL="0" marR="0" lvl="0" indent="0" algn="l" defTabSz="914400" rtl="0" eaLnBrk="1" fontAlgn="auto" latinLnBrk="0" hangingPunct="1">
+              <a:lnSpc>
+                <a:spcPct val="100000"/>
+              </a:lnSpc>
+              <a:spcBef>
+                <a:spcPts val="0"/>
+              </a:spcBef>
+              <a:spcAft>
+                <a:spcPts val="0"/>
+              </a:spcAft>
+              <a:buClrTx/>
+              <a:buSzTx/>
+              <a:buFontTx/>
+              <a:buNone/>
+              <a:tabLst/>
+              <a:defRPr/>
+            </a:pPr>
+            <a:r>
+              <a:rPr lang="en-US" dirty="0"/>
+              <a:t>Berkley, S. "Vaccination lags behind in middle-income countries." </a:t>
+            </a:r>
+            <a:r>
+              <a:rPr lang="en-US" i="1" dirty="0"/>
+              <a:t>Nature</a:t>
+            </a:r>
+            <a:r>
+              <a:rPr lang="en-US" dirty="0"/>
+              <a:t> 569.7756 (2019): 309.</a:t>
+            </a:r>
+            <a:br>
+              <a:rPr lang="en-US" dirty="0"/>
+            </a:br>
+            <a:endParaRPr lang="en-US" dirty="0"/>
+          </a:p>
+          <a:p>
+            <a:pPr marL="0" marR="0" lvl="0" indent="0" algn="l" defTabSz="914400" rtl="0" eaLnBrk="1" fontAlgn="auto" latinLnBrk="0" hangingPunct="1">
+              <a:lnSpc>
+                <a:spcPct val="100000"/>
+              </a:lnSpc>
+              <a:spcBef>
+                <a:spcPts val="0"/>
+              </a:spcBef>
+              <a:spcAft>
+                <a:spcPts val="0"/>
+              </a:spcAft>
+              <a:buClrTx/>
+              <a:buSzTx/>
+              <a:buFontTx/>
+              <a:buNone/>
+              <a:tabLst/>
+              <a:defRPr/>
+            </a:pPr>
+            <a:r>
+              <a:rPr lang="en-US" sz="1200" dirty="0"/>
+              <a:t>Costs for vaccines are thus higher in MICs because they are not subsidized</a:t>
+            </a:r>
+          </a:p>
+          <a:p>
+            <a:pPr marL="0" marR="0" lvl="0" indent="0" algn="l" defTabSz="914400" rtl="0" eaLnBrk="1" fontAlgn="auto" latinLnBrk="0" hangingPunct="1">
+              <a:lnSpc>
+                <a:spcPct val="100000"/>
+              </a:lnSpc>
+              <a:spcBef>
+                <a:spcPts val="0"/>
+              </a:spcBef>
+              <a:spcAft>
+                <a:spcPts val="0"/>
+              </a:spcAft>
+              <a:buClrTx/>
+              <a:buSzTx/>
+              <a:buFontTx/>
+              <a:buNone/>
+              <a:tabLst/>
+              <a:defRPr/>
+            </a:pPr>
+            <a:endParaRPr lang="en-US" sz="1200" dirty="0"/>
+          </a:p>
+          <a:p>
+            <a:pPr marL="0" marR="0" lvl="0" indent="0" algn="l" defTabSz="914400" rtl="0" eaLnBrk="1" fontAlgn="auto" latinLnBrk="0" hangingPunct="1">
+              <a:lnSpc>
+                <a:spcPct val="100000"/>
+              </a:lnSpc>
+              <a:spcBef>
+                <a:spcPts val="0"/>
+              </a:spcBef>
+              <a:spcAft>
+                <a:spcPts val="0"/>
+              </a:spcAft>
+              <a:buClrTx/>
+              <a:buSzTx/>
+              <a:buFontTx/>
+              <a:buNone/>
+              <a:tabLst/>
+              <a:defRPr/>
+            </a:pPr>
+            <a:r>
+              <a:rPr lang="en-US" sz="1200" dirty="0"/>
+              <a:t>In the middle income effect, children in weakest economies better protected than in some middle income countries</a:t>
+            </a:r>
+          </a:p>
+          <a:p>
+            <a:pPr marL="0" marR="0" lvl="0" indent="0" algn="l" defTabSz="914400" rtl="0" eaLnBrk="1" fontAlgn="auto" latinLnBrk="0" hangingPunct="1">
+              <a:lnSpc>
+                <a:spcPct val="100000"/>
+              </a:lnSpc>
+              <a:spcBef>
+                <a:spcPts val="0"/>
+              </a:spcBef>
+              <a:spcAft>
+                <a:spcPts val="0"/>
+              </a:spcAft>
+              <a:buClrTx/>
+              <a:buSzTx/>
+              <a:buFontTx/>
+              <a:buNone/>
+              <a:tabLst/>
+              <a:defRPr/>
+            </a:pPr>
+            <a:endParaRPr lang="en-US" sz="1200" dirty="0"/>
+          </a:p>
+          <a:p>
+            <a:endParaRPr lang="en-US" dirty="0"/>
+          </a:p>
+        </p:txBody>
+      </p:sp>
+      <p:sp>
+        <p:nvSpPr>
+          <p:cNvPr id="4" name="Slide Number Placeholder 3"/>
+          <p:cNvSpPr>
+            <a:spLocks noGrp="1"/>
+          </p:cNvSpPr>
+          <p:nvPr>
+            <p:ph type="sldNum" sz="quarter" idx="10"/>
+          </p:nvPr>
+        </p:nvSpPr>
+        <p:spPr/>
+        <p:txBody>
+          <a:bodyPr/>
+          <a:lstStyle/>
+          <a:p>
+            <a:fld id="{6DC9E9FF-7C85-4017-A0E8-7596D2FE69B9}" type="slidenum">
+              <a:rPr lang="en-US" smtClean="0"/>
+              <a:t>9</a:t>
+            </a:fld>
+            <a:endParaRPr lang="en-US" dirty="0"/>
+          </a:p>
+        </p:txBody>
+      </p:sp>
+    </p:spTree>
+    <p:extLst>
+      <p:ext uri="{BB962C8B-B14F-4D97-AF65-F5344CB8AC3E}">
+        <p14:creationId xmlns:p14="http://schemas.microsoft.com/office/powerpoint/2010/main" val="1207498189"/>
+      </p:ext>
+    </p:extLst>
+  </p:cSld>
+  <p:clrMapOvr>
+    <a:masterClrMapping/>
+  </p:clrMapOvr>
+</p:notes>
+</file>
+
+<file path=ppt/notesSlides/notesSlide8.xml><?xml version="1.0" encoding="utf-8"?>
+<p:notes xmlns:a="http://schemas.openxmlformats.org/drawingml/2006/main" xmlns:r="http://schemas.openxmlformats.org/officeDocument/2006/relationships" xmlns:p="http://schemas.openxmlformats.org/presentationml/2006/main">
+  <p:cSld>
+    <p:spTree>
+      <p:nvGrpSpPr>
+        <p:cNvPr id="1" name=""/>
+        <p:cNvGrpSpPr/>
+        <p:nvPr/>
+      </p:nvGrpSpPr>
+      <p:grpSpPr>
+        <a:xfrm>
+          <a:off x="0" y="0"/>
+          <a:ext cx="0" cy="0"/>
+          <a:chOff x="0" y="0"/>
+          <a:chExt cx="0" cy="0"/>
+        </a:xfrm>
+      </p:grpSpPr>
+      <p:sp>
+        <p:nvSpPr>
+          <p:cNvPr id="2" name="Slide Image Placeholder 1"/>
+          <p:cNvSpPr>
+            <a:spLocks noGrp="1" noRot="1" noChangeAspect="1"/>
+          </p:cNvSpPr>
+          <p:nvPr>
+            <p:ph type="sldImg"/>
+          </p:nvPr>
+        </p:nvSpPr>
+        <p:spPr/>
+      </p:sp>
+      <p:sp>
+        <p:nvSpPr>
+          <p:cNvPr id="3" name="Notes Placeholder 2"/>
+          <p:cNvSpPr>
+            <a:spLocks noGrp="1"/>
+          </p:cNvSpPr>
+          <p:nvPr>
+            <p:ph type="body" idx="1"/>
+          </p:nvPr>
+        </p:nvSpPr>
+        <p:spPr/>
+        <p:txBody>
+          <a:bodyPr/>
+          <a:lstStyle/>
+          <a:p>
+            <a:pPr marL="0" marR="0" lvl="0" indent="0" algn="l" defTabSz="914400" rtl="0" eaLnBrk="1" fontAlgn="auto" latinLnBrk="0" hangingPunct="1">
+              <a:lnSpc>
+                <a:spcPct val="100000"/>
+              </a:lnSpc>
+              <a:spcBef>
+                <a:spcPts val="0"/>
+              </a:spcBef>
+              <a:spcAft>
+                <a:spcPts val="0"/>
+              </a:spcAft>
+              <a:buClrTx/>
+              <a:buSzTx/>
+              <a:buFontTx/>
+              <a:buNone/>
+              <a:tabLst/>
+              <a:defRPr/>
+            </a:pPr>
+            <a:r>
+              <a:rPr lang="en-US" dirty="0"/>
+              <a:t>https://asia.nikkei.com/Spotlight/Datawatch/China-emerges-as-big-winner-in-vaccine-outreach</a:t>
+            </a:r>
+          </a:p>
+          <a:p>
+            <a:endParaRPr lang="en-US" dirty="0"/>
+          </a:p>
+        </p:txBody>
+      </p:sp>
+      <p:sp>
+        <p:nvSpPr>
+          <p:cNvPr id="4" name="Slide Number Placeholder 3"/>
+          <p:cNvSpPr>
+            <a:spLocks noGrp="1"/>
+          </p:cNvSpPr>
+          <p:nvPr>
+            <p:ph type="sldNum" sz="quarter" idx="5"/>
+          </p:nvPr>
+        </p:nvSpPr>
+        <p:spPr/>
+        <p:txBody>
+          <a:bodyPr/>
+          <a:lstStyle/>
+          <a:p>
+            <a:fld id="{6DC9E9FF-7C85-4017-A0E8-7596D2FE69B9}" type="slidenum">
+              <a:rPr lang="en-US" smtClean="0"/>
+              <a:t>10</a:t>
+            </a:fld>
+            <a:endParaRPr lang="en-US" dirty="0"/>
+          </a:p>
+        </p:txBody>
+      </p:sp>
+    </p:spTree>
+    <p:extLst>
+      <p:ext uri="{BB962C8B-B14F-4D97-AF65-F5344CB8AC3E}">
+        <p14:creationId xmlns:p14="http://schemas.microsoft.com/office/powerpoint/2010/main" val="2365422579"/>
+      </p:ext>
+    </p:extLst>
+  </p:cSld>
+  <p:clrMapOvr>
+    <a:masterClrMapping/>
+  </p:clrMapOvr>
+</p:notes>
+</file>
+
+<file path=ppt/notesSlides/notesSlide9.xml><?xml version="1.0" encoding="utf-8"?>
+<p:notes xmlns:a="http://schemas.openxmlformats.org/drawingml/2006/main" xmlns:r="http://schemas.openxmlformats.org/officeDocument/2006/relationships" xmlns:p="http://schemas.openxmlformats.org/presentationml/2006/main">
+  <p:cSld>
+    <p:spTree>
+      <p:nvGrpSpPr>
+        <p:cNvPr id="1" name=""/>
+        <p:cNvGrpSpPr/>
+        <p:nvPr/>
+      </p:nvGrpSpPr>
+      <p:grpSpPr>
+        <a:xfrm>
+          <a:off x="0" y="0"/>
+          <a:ext cx="0" cy="0"/>
+          <a:chOff x="0" y="0"/>
+          <a:chExt cx="0" cy="0"/>
+        </a:xfrm>
+      </p:grpSpPr>
+      <p:sp>
+        <p:nvSpPr>
+          <p:cNvPr id="2" name="Slide Image Placeholder 1"/>
+          <p:cNvSpPr>
+            <a:spLocks noGrp="1" noRot="1" noChangeAspect="1"/>
+          </p:cNvSpPr>
+          <p:nvPr>
+            <p:ph type="sldImg"/>
+          </p:nvPr>
+        </p:nvSpPr>
+        <p:spPr/>
+      </p:sp>
+      <p:sp>
+        <p:nvSpPr>
+          <p:cNvPr id="3" name="Notes Placeholder 2"/>
+          <p:cNvSpPr>
+            <a:spLocks noGrp="1"/>
+          </p:cNvSpPr>
+          <p:nvPr>
+            <p:ph type="body" idx="1"/>
+          </p:nvPr>
+        </p:nvSpPr>
+        <p:spPr/>
+        <p:txBody>
+          <a:bodyPr/>
+          <a:lstStyle/>
+          <a:p>
+            <a:r>
+              <a:rPr lang="en-US" dirty="0"/>
+              <a:t>https://www.gavi.org/vaccineswork/gavi-ceo-dr-seth-berkley-explains-covax-pillar</a:t>
+            </a:r>
+          </a:p>
+        </p:txBody>
+      </p:sp>
+      <p:sp>
+        <p:nvSpPr>
+          <p:cNvPr id="4" name="Slide Number Placeholder 3"/>
+          <p:cNvSpPr>
+            <a:spLocks noGrp="1"/>
+          </p:cNvSpPr>
+          <p:nvPr>
+            <p:ph type="sldNum" sz="quarter" idx="5"/>
+          </p:nvPr>
+        </p:nvSpPr>
+        <p:spPr/>
+        <p:txBody>
+          <a:bodyPr/>
+          <a:lstStyle/>
+          <a:p>
+            <a:fld id="{6DC9E9FF-7C85-4017-A0E8-7596D2FE69B9}" type="slidenum">
+              <a:rPr lang="en-US" smtClean="0"/>
+              <a:t>11</a:t>
+            </a:fld>
+            <a:endParaRPr lang="en-US" dirty="0"/>
+          </a:p>
+        </p:txBody>
+      </p:sp>
+    </p:spTree>
+    <p:extLst>
+      <p:ext uri="{BB962C8B-B14F-4D97-AF65-F5344CB8AC3E}">
+        <p14:creationId xmlns:p14="http://schemas.microsoft.com/office/powerpoint/2010/main" val="2357194663"/>
       </p:ext>
     </p:extLst>
   </p:cSld>
@@ -1005,7 +2365,7 @@
           <a:p>
             <a:fld id="{22E198F2-9BB6-425A-9FF9-F2F148E1B301}" type="datetimeFigureOut">
               <a:rPr lang="en-US" smtClean="0"/>
-              <a:t>11/12/2025</a:t>
+              <a:t>11/13/2025</a:t>
             </a:fld>
             <a:endParaRPr lang="en-US" dirty="0"/>
           </a:p>
@@ -1173,7 +2533,7 @@
           <a:p>
             <a:fld id="{22E198F2-9BB6-425A-9FF9-F2F148E1B301}" type="datetimeFigureOut">
               <a:rPr lang="en-US" smtClean="0"/>
-              <a:t>11/12/2025</a:t>
+              <a:t>11/13/2025</a:t>
             </a:fld>
             <a:endParaRPr lang="en-US" dirty="0"/>
           </a:p>
@@ -1351,7 +2711,7 @@
           <a:p>
             <a:fld id="{22E198F2-9BB6-425A-9FF9-F2F148E1B301}" type="datetimeFigureOut">
               <a:rPr lang="en-US" smtClean="0"/>
-              <a:t>11/12/2025</a:t>
+              <a:t>11/13/2025</a:t>
             </a:fld>
             <a:endParaRPr lang="en-US" dirty="0"/>
           </a:p>
@@ -1519,7 +2879,7 @@
           <a:p>
             <a:fld id="{22E198F2-9BB6-425A-9FF9-F2F148E1B301}" type="datetimeFigureOut">
               <a:rPr lang="en-US" smtClean="0"/>
-              <a:t>11/12/2025</a:t>
+              <a:t>11/13/2025</a:t>
             </a:fld>
             <a:endParaRPr lang="en-US" dirty="0"/>
           </a:p>
@@ -1764,7 +3124,7 @@
           <a:p>
             <a:fld id="{22E198F2-9BB6-425A-9FF9-F2F148E1B301}" type="datetimeFigureOut">
               <a:rPr lang="en-US" smtClean="0"/>
-              <a:t>11/12/2025</a:t>
+              <a:t>11/13/2025</a:t>
             </a:fld>
             <a:endParaRPr lang="en-US" dirty="0"/>
           </a:p>
@@ -1993,7 +3353,7 @@
           <a:p>
             <a:fld id="{22E198F2-9BB6-425A-9FF9-F2F148E1B301}" type="datetimeFigureOut">
               <a:rPr lang="en-US" smtClean="0"/>
-              <a:t>11/12/2025</a:t>
+              <a:t>11/13/2025</a:t>
             </a:fld>
             <a:endParaRPr lang="en-US" dirty="0"/>
           </a:p>
@@ -2357,7 +3717,7 @@
           <a:p>
             <a:fld id="{22E198F2-9BB6-425A-9FF9-F2F148E1B301}" type="datetimeFigureOut">
               <a:rPr lang="en-US" smtClean="0"/>
-              <a:t>11/12/2025</a:t>
+              <a:t>11/13/2025</a:t>
             </a:fld>
             <a:endParaRPr lang="en-US" dirty="0"/>
           </a:p>
@@ -2474,7 +3834,7 @@
           <a:p>
             <a:fld id="{22E198F2-9BB6-425A-9FF9-F2F148E1B301}" type="datetimeFigureOut">
               <a:rPr lang="en-US" smtClean="0"/>
-              <a:t>11/12/2025</a:t>
+              <a:t>11/13/2025</a:t>
             </a:fld>
             <a:endParaRPr lang="en-US" dirty="0"/>
           </a:p>
@@ -2569,7 +3929,7 @@
           <a:p>
             <a:fld id="{22E198F2-9BB6-425A-9FF9-F2F148E1B301}" type="datetimeFigureOut">
               <a:rPr lang="en-US" smtClean="0"/>
-              <a:t>11/12/2025</a:t>
+              <a:t>11/13/2025</a:t>
             </a:fld>
             <a:endParaRPr lang="en-US" dirty="0"/>
           </a:p>
@@ -2844,7 +4204,7 @@
           <a:p>
             <a:fld id="{22E198F2-9BB6-425A-9FF9-F2F148E1B301}" type="datetimeFigureOut">
               <a:rPr lang="en-US" smtClean="0"/>
-              <a:t>11/12/2025</a:t>
+              <a:t>11/13/2025</a:t>
             </a:fld>
             <a:endParaRPr lang="en-US" dirty="0"/>
           </a:p>
@@ -3096,7 +4456,7 @@
           <a:p>
             <a:fld id="{22E198F2-9BB6-425A-9FF9-F2F148E1B301}" type="datetimeFigureOut">
               <a:rPr lang="en-US" smtClean="0"/>
-              <a:t>11/12/2025</a:t>
+              <a:t>11/13/2025</a:t>
             </a:fld>
             <a:endParaRPr lang="en-US" dirty="0"/>
           </a:p>
@@ -3307,7 +4667,7 @@
           <a:p>
             <a:fld id="{22E198F2-9BB6-425A-9FF9-F2F148E1B301}" type="datetimeFigureOut">
               <a:rPr lang="en-US" smtClean="0"/>
-              <a:t>11/12/2025</a:t>
+              <a:t>11/13/2025</a:t>
             </a:fld>
             <a:endParaRPr lang="en-US" dirty="0"/>
           </a:p>
@@ -3819,6 +5179,1835 @@
 </p:sld>
 </file>
 
+<file path=ppt/slides/slide10.xml><?xml version="1.0" encoding="utf-8"?>
+<p:sld xmlns:a="http://schemas.openxmlformats.org/drawingml/2006/main" xmlns:r="http://schemas.openxmlformats.org/officeDocument/2006/relationships" xmlns:p="http://schemas.openxmlformats.org/presentationml/2006/main">
+  <p:cSld>
+    <p:spTree>
+      <p:nvGrpSpPr>
+        <p:cNvPr id="1" name=""/>
+        <p:cNvGrpSpPr/>
+        <p:nvPr/>
+      </p:nvGrpSpPr>
+      <p:grpSpPr>
+        <a:xfrm>
+          <a:off x="0" y="0"/>
+          <a:ext cx="0" cy="0"/>
+          <a:chOff x="0" y="0"/>
+          <a:chExt cx="0" cy="0"/>
+        </a:xfrm>
+      </p:grpSpPr>
+      <p:sp>
+        <p:nvSpPr>
+          <p:cNvPr id="2" name="Title 1">
+            <a:extLst>
+              <a:ext uri="{FF2B5EF4-FFF2-40B4-BE49-F238E27FC236}">
+                <a16:creationId xmlns:a16="http://schemas.microsoft.com/office/drawing/2014/main" id="{0A5E12FD-069F-44C5-A4D1-A4734B677365}"/>
+              </a:ext>
+            </a:extLst>
+          </p:cNvPr>
+          <p:cNvSpPr>
+            <a:spLocks noGrp="1"/>
+          </p:cNvSpPr>
+          <p:nvPr>
+            <p:ph type="title"/>
+          </p:nvPr>
+        </p:nvSpPr>
+        <p:spPr>
+          <a:xfrm>
+            <a:off x="6096000" y="51974"/>
+            <a:ext cx="4440364" cy="1325563"/>
+          </a:xfrm>
+        </p:spPr>
+        <p:txBody>
+          <a:bodyPr/>
+          <a:lstStyle/>
+          <a:p>
+            <a:r>
+              <a:rPr lang="en-US" dirty="0"/>
+              <a:t>Vaccine diplomacy</a:t>
+            </a:r>
+          </a:p>
+        </p:txBody>
+      </p:sp>
+      <p:sp>
+        <p:nvSpPr>
+          <p:cNvPr id="3" name="Content Placeholder 2">
+            <a:extLst>
+              <a:ext uri="{FF2B5EF4-FFF2-40B4-BE49-F238E27FC236}">
+                <a16:creationId xmlns:a16="http://schemas.microsoft.com/office/drawing/2014/main" id="{9152DD19-3AD5-4C11-A0B0-E3C1E63F3F6B}"/>
+              </a:ext>
+            </a:extLst>
+          </p:cNvPr>
+          <p:cNvSpPr>
+            <a:spLocks noGrp="1"/>
+          </p:cNvSpPr>
+          <p:nvPr>
+            <p:ph idx="1"/>
+          </p:nvPr>
+        </p:nvSpPr>
+        <p:spPr>
+          <a:xfrm>
+            <a:off x="474906" y="325678"/>
+            <a:ext cx="4349280" cy="6167198"/>
+          </a:xfrm>
+        </p:spPr>
+        <p:txBody>
+          <a:bodyPr>
+            <a:normAutofit/>
+          </a:bodyPr>
+          <a:lstStyle/>
+          <a:p>
+            <a:r>
+              <a:rPr lang="en-US" sz="2400" dirty="0">
+                <a:latin typeface="+mj-lt"/>
+              </a:rPr>
+              <a:t>Encompasses the politics that go into the coordination of vaccine development, manufacturing, and distribution.</a:t>
+            </a:r>
+          </a:p>
+          <a:p>
+            <a:r>
+              <a:rPr lang="en-US" sz="2400" dirty="0">
+                <a:latin typeface="+mj-lt"/>
+              </a:rPr>
+              <a:t>Involves national governments, multinational corporations, universities, and global entities like the WHO</a:t>
+            </a:r>
+          </a:p>
+          <a:p>
+            <a:r>
+              <a:rPr lang="en-US" sz="2400" dirty="0">
+                <a:latin typeface="+mj-lt"/>
+              </a:rPr>
+              <a:t>Vaccines can reinforce existing power relationships or be used to realign them</a:t>
+            </a:r>
+          </a:p>
+          <a:p>
+            <a:r>
+              <a:rPr lang="en-US" sz="2400" dirty="0">
+                <a:latin typeface="+mj-lt"/>
+              </a:rPr>
+              <a:t>For example, China has provided its vaccines as a way of exerting economic influence – the Chinese ‘health Silk Road’</a:t>
+            </a:r>
+            <a:endParaRPr lang="en-US" sz="2000" dirty="0"/>
+          </a:p>
+        </p:txBody>
+      </p:sp>
+      <p:pic>
+        <p:nvPicPr>
+          <p:cNvPr id="4" name="Content Placeholder 4" descr="Map&#10;&#10;Description automatically generated">
+            <a:extLst>
+              <a:ext uri="{FF2B5EF4-FFF2-40B4-BE49-F238E27FC236}">
+                <a16:creationId xmlns:a16="http://schemas.microsoft.com/office/drawing/2014/main" id="{EEF08066-9D12-74AE-842A-601DF89EC1DA}"/>
+              </a:ext>
+            </a:extLst>
+          </p:cNvPr>
+          <p:cNvPicPr>
+            <a:picLocks noChangeAspect="1"/>
+          </p:cNvPicPr>
+          <p:nvPr/>
+        </p:nvPicPr>
+        <p:blipFill rotWithShape="1">
+          <a:blip r:embed="rId3">
+            <a:extLst>
+              <a:ext uri="{28A0092B-C50C-407E-A947-70E740481C1C}">
+                <a14:useLocalDpi xmlns:a14="http://schemas.microsoft.com/office/drawing/2010/main" val="0"/>
+              </a:ext>
+            </a:extLst>
+          </a:blip>
+          <a:srcRect r="1493"/>
+          <a:stretch/>
+        </p:blipFill>
+        <p:spPr>
+          <a:xfrm>
+            <a:off x="4915270" y="1374147"/>
+            <a:ext cx="6984456" cy="5237102"/>
+          </a:xfrm>
+          <a:prstGeom prst="rect">
+            <a:avLst/>
+          </a:prstGeom>
+        </p:spPr>
+      </p:pic>
+    </p:spTree>
+    <p:extLst>
+      <p:ext uri="{BB962C8B-B14F-4D97-AF65-F5344CB8AC3E}">
+        <p14:creationId xmlns:p14="http://schemas.microsoft.com/office/powerpoint/2010/main" val="1367652106"/>
+      </p:ext>
+    </p:extLst>
+  </p:cSld>
+  <p:clrMapOvr>
+    <a:masterClrMapping/>
+  </p:clrMapOvr>
+</p:sld>
+</file>
+
+<file path=ppt/slides/slide11.xml><?xml version="1.0" encoding="utf-8"?>
+<p:sld xmlns:a="http://schemas.openxmlformats.org/drawingml/2006/main" xmlns:r="http://schemas.openxmlformats.org/officeDocument/2006/relationships" xmlns:p="http://schemas.openxmlformats.org/presentationml/2006/main">
+  <p:cSld>
+    <p:spTree>
+      <p:nvGrpSpPr>
+        <p:cNvPr id="1" name=""/>
+        <p:cNvGrpSpPr/>
+        <p:nvPr/>
+      </p:nvGrpSpPr>
+      <p:grpSpPr>
+        <a:xfrm>
+          <a:off x="0" y="0"/>
+          <a:ext cx="0" cy="0"/>
+          <a:chOff x="0" y="0"/>
+          <a:chExt cx="0" cy="0"/>
+        </a:xfrm>
+      </p:grpSpPr>
+      <p:sp>
+        <p:nvSpPr>
+          <p:cNvPr id="3" name="Content Placeholder 2">
+            <a:extLst>
+              <a:ext uri="{FF2B5EF4-FFF2-40B4-BE49-F238E27FC236}">
+                <a16:creationId xmlns:a16="http://schemas.microsoft.com/office/drawing/2014/main" id="{3B9C6D41-13F6-4610-AE47-112427E45E07}"/>
+              </a:ext>
+            </a:extLst>
+          </p:cNvPr>
+          <p:cNvSpPr>
+            <a:spLocks noGrp="1"/>
+          </p:cNvSpPr>
+          <p:nvPr>
+            <p:ph idx="1"/>
+          </p:nvPr>
+        </p:nvSpPr>
+        <p:spPr>
+          <a:xfrm>
+            <a:off x="431800" y="532434"/>
+            <a:ext cx="4059178" cy="6109665"/>
+          </a:xfrm>
+        </p:spPr>
+        <p:txBody>
+          <a:bodyPr>
+            <a:normAutofit/>
+          </a:bodyPr>
+          <a:lstStyle/>
+          <a:p>
+            <a:r>
+              <a:rPr lang="en-US" dirty="0"/>
+              <a:t>COVAX is an example of vaccine diplomacy</a:t>
+            </a:r>
+          </a:p>
+          <a:p>
+            <a:r>
+              <a:rPr lang="en-US" dirty="0"/>
+              <a:t>COVAX pooled resources of many countries to promote cooperation in the development and deployment of Covid vaccines to all people of the world</a:t>
+            </a:r>
+          </a:p>
+          <a:p>
+            <a:r>
+              <a:rPr lang="en-US" sz="2800" dirty="0">
+                <a:latin typeface="Calibri Light" panose="020F0302020204030204" pitchFamily="34" charset="0"/>
+                <a:cs typeface="Calibri Light" panose="020F0302020204030204" pitchFamily="34" charset="0"/>
+              </a:rPr>
+              <a:t>Aim was lower vaccine costs for everyone and a swifter end to the pandemic</a:t>
+            </a:r>
+          </a:p>
+          <a:p>
+            <a:pPr marL="0" indent="0">
+              <a:buNone/>
+            </a:pPr>
+            <a:endParaRPr lang="en-US" dirty="0"/>
+          </a:p>
+          <a:p>
+            <a:endParaRPr lang="en-US" dirty="0"/>
+          </a:p>
+          <a:p>
+            <a:endParaRPr lang="en-US" dirty="0"/>
+          </a:p>
+        </p:txBody>
+      </p:sp>
+      <p:pic>
+        <p:nvPicPr>
+          <p:cNvPr id="5" name="Content Placeholder 4">
+            <a:extLst>
+              <a:ext uri="{FF2B5EF4-FFF2-40B4-BE49-F238E27FC236}">
+                <a16:creationId xmlns:a16="http://schemas.microsoft.com/office/drawing/2014/main" id="{DF9228DA-9EAE-4535-92A6-3E691BD5195F}"/>
+              </a:ext>
+            </a:extLst>
+          </p:cNvPr>
+          <p:cNvPicPr>
+            <a:picLocks noChangeAspect="1"/>
+          </p:cNvPicPr>
+          <p:nvPr/>
+        </p:nvPicPr>
+        <p:blipFill rotWithShape="1">
+          <a:blip r:embed="rId3"/>
+          <a:srcRect b="15299"/>
+          <a:stretch/>
+        </p:blipFill>
+        <p:spPr>
+          <a:xfrm>
+            <a:off x="5098465" y="1690687"/>
+            <a:ext cx="6820337" cy="3749413"/>
+          </a:xfrm>
+          <a:prstGeom prst="rect">
+            <a:avLst/>
+          </a:prstGeom>
+        </p:spPr>
+      </p:pic>
+      <p:sp>
+        <p:nvSpPr>
+          <p:cNvPr id="8" name="Title 1">
+            <a:extLst>
+              <a:ext uri="{FF2B5EF4-FFF2-40B4-BE49-F238E27FC236}">
+                <a16:creationId xmlns:a16="http://schemas.microsoft.com/office/drawing/2014/main" id="{23356601-711D-42F3-B0AC-934E45A0A2CE}"/>
+              </a:ext>
+            </a:extLst>
+          </p:cNvPr>
+          <p:cNvSpPr>
+            <a:spLocks noGrp="1"/>
+          </p:cNvSpPr>
+          <p:nvPr>
+            <p:ph type="title"/>
+          </p:nvPr>
+        </p:nvSpPr>
+        <p:spPr>
+          <a:xfrm>
+            <a:off x="5343646" y="365124"/>
+            <a:ext cx="5664200" cy="1325563"/>
+          </a:xfrm>
+        </p:spPr>
+        <p:txBody>
+          <a:bodyPr/>
+          <a:lstStyle/>
+          <a:p>
+            <a:pPr algn="ctr"/>
+            <a:r>
+              <a:rPr lang="en-US" dirty="0"/>
+              <a:t>COVAX</a:t>
+            </a:r>
+          </a:p>
+        </p:txBody>
+      </p:sp>
+    </p:spTree>
+    <p:extLst>
+      <p:ext uri="{BB962C8B-B14F-4D97-AF65-F5344CB8AC3E}">
+        <p14:creationId xmlns:p14="http://schemas.microsoft.com/office/powerpoint/2010/main" val="2152623958"/>
+      </p:ext>
+    </p:extLst>
+  </p:cSld>
+  <p:clrMapOvr>
+    <a:masterClrMapping/>
+  </p:clrMapOvr>
+</p:sld>
+</file>
+
+<file path=ppt/slides/slide12.xml><?xml version="1.0" encoding="utf-8"?>
+<p:sld xmlns:a="http://schemas.openxmlformats.org/drawingml/2006/main" xmlns:r="http://schemas.openxmlformats.org/officeDocument/2006/relationships" xmlns:p="http://schemas.openxmlformats.org/presentationml/2006/main">
+  <p:cSld>
+    <p:spTree>
+      <p:nvGrpSpPr>
+        <p:cNvPr id="1" name=""/>
+        <p:cNvGrpSpPr/>
+        <p:nvPr/>
+      </p:nvGrpSpPr>
+      <p:grpSpPr>
+        <a:xfrm>
+          <a:off x="0" y="0"/>
+          <a:ext cx="0" cy="0"/>
+          <a:chOff x="0" y="0"/>
+          <a:chExt cx="0" cy="0"/>
+        </a:xfrm>
+      </p:grpSpPr>
+      <p:sp>
+        <p:nvSpPr>
+          <p:cNvPr id="3" name="Content Placeholder 2">
+            <a:extLst>
+              <a:ext uri="{FF2B5EF4-FFF2-40B4-BE49-F238E27FC236}">
+                <a16:creationId xmlns:a16="http://schemas.microsoft.com/office/drawing/2014/main" id="{F23615EE-CA01-4F77-8CC1-47A42222B491}"/>
+              </a:ext>
+            </a:extLst>
+          </p:cNvPr>
+          <p:cNvSpPr>
+            <a:spLocks noGrp="1"/>
+          </p:cNvSpPr>
+          <p:nvPr>
+            <p:ph idx="1"/>
+          </p:nvPr>
+        </p:nvSpPr>
+        <p:spPr>
+          <a:xfrm>
+            <a:off x="601884" y="350520"/>
+            <a:ext cx="5134549" cy="6156959"/>
+          </a:xfrm>
+        </p:spPr>
+        <p:txBody>
+          <a:bodyPr>
+            <a:normAutofit/>
+          </a:bodyPr>
+          <a:lstStyle/>
+          <a:p>
+            <a:r>
+              <a:rPr lang="en-US" dirty="0">
+                <a:latin typeface="Calibri Light" panose="020F0302020204030204" pitchFamily="34" charset="0"/>
+                <a:cs typeface="Calibri Light" panose="020F0302020204030204" pitchFamily="34" charset="0"/>
+              </a:rPr>
+              <a:t>However, COVAX fell short of its goals</a:t>
+            </a:r>
+          </a:p>
+          <a:p>
+            <a:r>
+              <a:rPr lang="en-US" dirty="0">
+                <a:latin typeface="Calibri Light" panose="020F0302020204030204" pitchFamily="34" charset="0"/>
+                <a:cs typeface="Calibri Light" panose="020F0302020204030204" pitchFamily="34" charset="0"/>
+              </a:rPr>
+              <a:t>Powerful countries prioritized vaccines for their own citizens</a:t>
+            </a:r>
+          </a:p>
+          <a:p>
+            <a:r>
+              <a:rPr lang="en-US" dirty="0">
+                <a:latin typeface="Calibri Light" panose="020F0302020204030204" pitchFamily="34" charset="0"/>
+                <a:cs typeface="Calibri Light" panose="020F0302020204030204" pitchFamily="34" charset="0"/>
+              </a:rPr>
+              <a:t>By end of 2021, more people had been vaccinated in high-income countries than in more populous low-income countries</a:t>
+            </a:r>
+          </a:p>
+          <a:p>
+            <a:r>
+              <a:rPr lang="en-US" dirty="0"/>
+              <a:t>Vaccination rates were 75% in high-income countries, but less than 2% in some low-income countries. </a:t>
+            </a:r>
+          </a:p>
+          <a:p>
+            <a:endParaRPr lang="en-US" sz="1900" dirty="0">
+              <a:latin typeface="Calibri Light" panose="020F0302020204030204" pitchFamily="34" charset="0"/>
+              <a:cs typeface="Calibri Light" panose="020F0302020204030204" pitchFamily="34" charset="0"/>
+            </a:endParaRPr>
+          </a:p>
+          <a:p>
+            <a:endParaRPr lang="en-US" sz="2600" dirty="0">
+              <a:latin typeface="Calibri Light" panose="020F0302020204030204" pitchFamily="34" charset="0"/>
+              <a:cs typeface="Calibri Light" panose="020F0302020204030204" pitchFamily="34" charset="0"/>
+            </a:endParaRPr>
+          </a:p>
+          <a:p>
+            <a:endParaRPr lang="en-US" sz="2600" dirty="0">
+              <a:latin typeface="Calibri Light" panose="020F0302020204030204" pitchFamily="34" charset="0"/>
+              <a:cs typeface="Calibri Light" panose="020F0302020204030204" pitchFamily="34" charset="0"/>
+            </a:endParaRPr>
+          </a:p>
+          <a:p>
+            <a:endParaRPr lang="en-US" sz="2600" dirty="0">
+              <a:latin typeface="Calibri Light" panose="020F0302020204030204" pitchFamily="34" charset="0"/>
+              <a:cs typeface="Calibri Light" panose="020F0302020204030204" pitchFamily="34" charset="0"/>
+            </a:endParaRPr>
+          </a:p>
+        </p:txBody>
+      </p:sp>
+      <p:pic>
+        <p:nvPicPr>
+          <p:cNvPr id="8" name="Picture 7" descr="A picture containing text, group, several&#10;&#10;Description automatically generated">
+            <a:extLst>
+              <a:ext uri="{FF2B5EF4-FFF2-40B4-BE49-F238E27FC236}">
+                <a16:creationId xmlns:a16="http://schemas.microsoft.com/office/drawing/2014/main" id="{D5A961BD-5213-8DDD-3925-6321B8B13C68}"/>
+              </a:ext>
+            </a:extLst>
+          </p:cNvPr>
+          <p:cNvPicPr>
+            <a:picLocks noChangeAspect="1"/>
+          </p:cNvPicPr>
+          <p:nvPr/>
+        </p:nvPicPr>
+        <p:blipFill>
+          <a:blip r:embed="rId3">
+            <a:extLst>
+              <a:ext uri="{28A0092B-C50C-407E-A947-70E740481C1C}">
+                <a14:useLocalDpi xmlns:a14="http://schemas.microsoft.com/office/drawing/2010/main" val="0"/>
+              </a:ext>
+            </a:extLst>
+          </a:blip>
+          <a:stretch>
+            <a:fillRect/>
+          </a:stretch>
+        </p:blipFill>
+        <p:spPr>
+          <a:xfrm>
+            <a:off x="6096000" y="0"/>
+            <a:ext cx="5134550" cy="6858000"/>
+          </a:xfrm>
+          <a:prstGeom prst="rect">
+            <a:avLst/>
+          </a:prstGeom>
+        </p:spPr>
+      </p:pic>
+    </p:spTree>
+    <p:extLst>
+      <p:ext uri="{BB962C8B-B14F-4D97-AF65-F5344CB8AC3E}">
+        <p14:creationId xmlns:p14="http://schemas.microsoft.com/office/powerpoint/2010/main" val="3271063462"/>
+      </p:ext>
+    </p:extLst>
+  </p:cSld>
+  <p:clrMapOvr>
+    <a:masterClrMapping/>
+  </p:clrMapOvr>
+</p:sld>
+</file>
+
+<file path=ppt/slides/slide13.xml><?xml version="1.0" encoding="utf-8"?>
+<p:sld xmlns:a="http://schemas.openxmlformats.org/drawingml/2006/main" xmlns:r="http://schemas.openxmlformats.org/officeDocument/2006/relationships" xmlns:p="http://schemas.openxmlformats.org/presentationml/2006/main">
+  <p:cSld>
+    <p:spTree>
+      <p:nvGrpSpPr>
+        <p:cNvPr id="1" name=""/>
+        <p:cNvGrpSpPr/>
+        <p:nvPr/>
+      </p:nvGrpSpPr>
+      <p:grpSpPr>
+        <a:xfrm>
+          <a:off x="0" y="0"/>
+          <a:ext cx="0" cy="0"/>
+          <a:chOff x="0" y="0"/>
+          <a:chExt cx="0" cy="0"/>
+        </a:xfrm>
+      </p:grpSpPr>
+      <p:pic>
+        <p:nvPicPr>
+          <p:cNvPr id="4" name="Content Placeholder 3" descr="A graph of a number of people with different colored bars&#10;&#10;Description automatically generated with medium confidence">
+            <a:extLst>
+              <a:ext uri="{FF2B5EF4-FFF2-40B4-BE49-F238E27FC236}">
+                <a16:creationId xmlns:a16="http://schemas.microsoft.com/office/drawing/2014/main" id="{62D06841-AE43-672E-7F74-2FC409306BF7}"/>
+              </a:ext>
+            </a:extLst>
+          </p:cNvPr>
+          <p:cNvPicPr>
+            <a:picLocks noGrp="1" noChangeAspect="1"/>
+          </p:cNvPicPr>
+          <p:nvPr>
+            <p:ph idx="1"/>
+          </p:nvPr>
+        </p:nvPicPr>
+        <p:blipFill>
+          <a:blip r:embed="rId3">
+            <a:extLst>
+              <a:ext uri="{28A0092B-C50C-407E-A947-70E740481C1C}">
+                <a14:useLocalDpi xmlns:a14="http://schemas.microsoft.com/office/drawing/2010/main" val="0"/>
+              </a:ext>
+            </a:extLst>
+          </a:blip>
+          <a:srcRect t="56240"/>
+          <a:stretch>
+            <a:fillRect/>
+          </a:stretch>
+        </p:blipFill>
+        <p:spPr>
+          <a:xfrm>
+            <a:off x="4567177" y="2951543"/>
+            <a:ext cx="7429978" cy="2917987"/>
+          </a:xfrm>
+          <a:prstGeom prst="rect">
+            <a:avLst/>
+          </a:prstGeom>
+        </p:spPr>
+      </p:pic>
+      <p:sp>
+        <p:nvSpPr>
+          <p:cNvPr id="5" name="Content Placeholder 2">
+            <a:extLst>
+              <a:ext uri="{FF2B5EF4-FFF2-40B4-BE49-F238E27FC236}">
+                <a16:creationId xmlns:a16="http://schemas.microsoft.com/office/drawing/2014/main" id="{06CD1050-8417-2741-BDD3-85D8C24ADDA9}"/>
+              </a:ext>
+            </a:extLst>
+          </p:cNvPr>
+          <p:cNvSpPr txBox="1">
+            <a:spLocks/>
+          </p:cNvSpPr>
+          <p:nvPr/>
+        </p:nvSpPr>
+        <p:spPr>
+          <a:xfrm>
+            <a:off x="113822" y="536086"/>
+            <a:ext cx="4261408" cy="6132098"/>
+          </a:xfrm>
+          <a:prstGeom prst="rect">
+            <a:avLst/>
+          </a:prstGeom>
+        </p:spPr>
+        <p:txBody>
+          <a:bodyPr vert="horz" lIns="91440" tIns="45720" rIns="91440" bIns="45720" rtlCol="0">
+            <a:normAutofit/>
+          </a:bodyPr>
+          <a:lstStyle>
+            <a:lvl1pPr marL="228600" indent="-228600" algn="l" defTabSz="914400" rtl="0" eaLnBrk="1" latinLnBrk="0" hangingPunct="1">
+              <a:lnSpc>
+                <a:spcPct val="90000"/>
+              </a:lnSpc>
+              <a:spcBef>
+                <a:spcPts val="1000"/>
+              </a:spcBef>
+              <a:buFont typeface="Arial" panose="020B0604020202020204" pitchFamily="34" charset="0"/>
+              <a:buChar char="•"/>
+              <a:defRPr sz="2800" kern="1200">
+                <a:solidFill>
+                  <a:schemeClr val="tx1"/>
+                </a:solidFill>
+                <a:latin typeface="+mn-lt"/>
+                <a:ea typeface="+mn-ea"/>
+                <a:cs typeface="+mn-cs"/>
+              </a:defRPr>
+            </a:lvl1pPr>
+            <a:lvl2pPr marL="685800" indent="-228600" algn="l" defTabSz="914400" rtl="0" eaLnBrk="1" latinLnBrk="0" hangingPunct="1">
+              <a:lnSpc>
+                <a:spcPct val="90000"/>
+              </a:lnSpc>
+              <a:spcBef>
+                <a:spcPts val="500"/>
+              </a:spcBef>
+              <a:buFont typeface="Arial" panose="020B0604020202020204" pitchFamily="34" charset="0"/>
+              <a:buChar char="•"/>
+              <a:defRPr sz="2400" kern="1200">
+                <a:solidFill>
+                  <a:schemeClr val="tx1"/>
+                </a:solidFill>
+                <a:latin typeface="+mn-lt"/>
+                <a:ea typeface="+mn-ea"/>
+                <a:cs typeface="+mn-cs"/>
+              </a:defRPr>
+            </a:lvl2pPr>
+            <a:lvl3pPr marL="1143000" indent="-228600" algn="l" defTabSz="914400" rtl="0" eaLnBrk="1" latinLnBrk="0" hangingPunct="1">
+              <a:lnSpc>
+                <a:spcPct val="90000"/>
+              </a:lnSpc>
+              <a:spcBef>
+                <a:spcPts val="500"/>
+              </a:spcBef>
+              <a:buFont typeface="Arial" panose="020B0604020202020204" pitchFamily="34" charset="0"/>
+              <a:buChar char="•"/>
+              <a:defRPr sz="2000" kern="1200">
+                <a:solidFill>
+                  <a:schemeClr val="tx1"/>
+                </a:solidFill>
+                <a:latin typeface="+mn-lt"/>
+                <a:ea typeface="+mn-ea"/>
+                <a:cs typeface="+mn-cs"/>
+              </a:defRPr>
+            </a:lvl3pPr>
+            <a:lvl4pPr marL="1600200" indent="-228600" algn="l" defTabSz="914400" rtl="0" eaLnBrk="1" latinLnBrk="0" hangingPunct="1">
+              <a:lnSpc>
+                <a:spcPct val="90000"/>
+              </a:lnSpc>
+              <a:spcBef>
+                <a:spcPts val="500"/>
+              </a:spcBef>
+              <a:buFont typeface="Arial" panose="020B0604020202020204" pitchFamily="34" charset="0"/>
+              <a:buChar char="•"/>
+              <a:defRPr sz="1800" kern="1200">
+                <a:solidFill>
+                  <a:schemeClr val="tx1"/>
+                </a:solidFill>
+                <a:latin typeface="+mn-lt"/>
+                <a:ea typeface="+mn-ea"/>
+                <a:cs typeface="+mn-cs"/>
+              </a:defRPr>
+            </a:lvl4pPr>
+            <a:lvl5pPr marL="2057400" indent="-228600" algn="l" defTabSz="914400" rtl="0" eaLnBrk="1" latinLnBrk="0" hangingPunct="1">
+              <a:lnSpc>
+                <a:spcPct val="90000"/>
+              </a:lnSpc>
+              <a:spcBef>
+                <a:spcPts val="500"/>
+              </a:spcBef>
+              <a:buFont typeface="Arial" panose="020B0604020202020204" pitchFamily="34" charset="0"/>
+              <a:buChar char="•"/>
+              <a:defRPr sz="1800" kern="1200">
+                <a:solidFill>
+                  <a:schemeClr val="tx1"/>
+                </a:solidFill>
+                <a:latin typeface="+mn-lt"/>
+                <a:ea typeface="+mn-ea"/>
+                <a:cs typeface="+mn-cs"/>
+              </a:defRPr>
+            </a:lvl5pPr>
+            <a:lvl6pPr marL="2514600" indent="-228600" algn="l" defTabSz="914400" rtl="0" eaLnBrk="1" latinLnBrk="0" hangingPunct="1">
+              <a:lnSpc>
+                <a:spcPct val="90000"/>
+              </a:lnSpc>
+              <a:spcBef>
+                <a:spcPts val="500"/>
+              </a:spcBef>
+              <a:buFont typeface="Arial" panose="020B0604020202020204" pitchFamily="34" charset="0"/>
+              <a:buChar char="•"/>
+              <a:defRPr sz="1800" kern="1200">
+                <a:solidFill>
+                  <a:schemeClr val="tx1"/>
+                </a:solidFill>
+                <a:latin typeface="+mn-lt"/>
+                <a:ea typeface="+mn-ea"/>
+                <a:cs typeface="+mn-cs"/>
+              </a:defRPr>
+            </a:lvl6pPr>
+            <a:lvl7pPr marL="2971800" indent="-228600" algn="l" defTabSz="914400" rtl="0" eaLnBrk="1" latinLnBrk="0" hangingPunct="1">
+              <a:lnSpc>
+                <a:spcPct val="90000"/>
+              </a:lnSpc>
+              <a:spcBef>
+                <a:spcPts val="500"/>
+              </a:spcBef>
+              <a:buFont typeface="Arial" panose="020B0604020202020204" pitchFamily="34" charset="0"/>
+              <a:buChar char="•"/>
+              <a:defRPr sz="1800" kern="1200">
+                <a:solidFill>
+                  <a:schemeClr val="tx1"/>
+                </a:solidFill>
+                <a:latin typeface="+mn-lt"/>
+                <a:ea typeface="+mn-ea"/>
+                <a:cs typeface="+mn-cs"/>
+              </a:defRPr>
+            </a:lvl7pPr>
+            <a:lvl8pPr marL="3429000" indent="-228600" algn="l" defTabSz="914400" rtl="0" eaLnBrk="1" latinLnBrk="0" hangingPunct="1">
+              <a:lnSpc>
+                <a:spcPct val="90000"/>
+              </a:lnSpc>
+              <a:spcBef>
+                <a:spcPts val="500"/>
+              </a:spcBef>
+              <a:buFont typeface="Arial" panose="020B0604020202020204" pitchFamily="34" charset="0"/>
+              <a:buChar char="•"/>
+              <a:defRPr sz="1800" kern="1200">
+                <a:solidFill>
+                  <a:schemeClr val="tx1"/>
+                </a:solidFill>
+                <a:latin typeface="+mn-lt"/>
+                <a:ea typeface="+mn-ea"/>
+                <a:cs typeface="+mn-cs"/>
+              </a:defRPr>
+            </a:lvl8pPr>
+            <a:lvl9pPr marL="3886200" indent="-228600" algn="l" defTabSz="914400" rtl="0" eaLnBrk="1" latinLnBrk="0" hangingPunct="1">
+              <a:lnSpc>
+                <a:spcPct val="90000"/>
+              </a:lnSpc>
+              <a:spcBef>
+                <a:spcPts val="500"/>
+              </a:spcBef>
+              <a:buFont typeface="Arial" panose="020B0604020202020204" pitchFamily="34" charset="0"/>
+              <a:buChar char="•"/>
+              <a:defRPr sz="1800" kern="1200">
+                <a:solidFill>
+                  <a:schemeClr val="tx1"/>
+                </a:solidFill>
+                <a:latin typeface="+mn-lt"/>
+                <a:ea typeface="+mn-ea"/>
+                <a:cs typeface="+mn-cs"/>
+              </a:defRPr>
+            </a:lvl9pPr>
+          </a:lstStyle>
+          <a:p>
+            <a:r>
+              <a:rPr lang="en-US" sz="3200" dirty="0"/>
+              <a:t>Wealthy countries had vaccine surpluses and vaccinated young children, who are at relatively low risk of serious disease. </a:t>
+            </a:r>
+          </a:p>
+          <a:p>
+            <a:r>
+              <a:rPr lang="en-US" sz="3200" dirty="0"/>
+              <a:t>Meanwhile, many poorer countries still did not have enough supply to vaccinate the people at highest risk of death from COVID-19</a:t>
+            </a:r>
+            <a:r>
+              <a:rPr lang="en-US" dirty="0"/>
+              <a:t>.</a:t>
+            </a:r>
+          </a:p>
+        </p:txBody>
+      </p:sp>
+      <p:pic>
+        <p:nvPicPr>
+          <p:cNvPr id="2" name="Content Placeholder 3" descr="A graph of a number of people with different colored bars&#10;&#10;Description automatically generated with medium confidence">
+            <a:extLst>
+              <a:ext uri="{FF2B5EF4-FFF2-40B4-BE49-F238E27FC236}">
+                <a16:creationId xmlns:a16="http://schemas.microsoft.com/office/drawing/2014/main" id="{468BDADE-7BE1-E698-F9AB-0C59EBDE901F}"/>
+              </a:ext>
+            </a:extLst>
+          </p:cNvPr>
+          <p:cNvPicPr>
+            <a:picLocks noChangeAspect="1"/>
+          </p:cNvPicPr>
+          <p:nvPr/>
+        </p:nvPicPr>
+        <p:blipFill>
+          <a:blip r:embed="rId3">
+            <a:extLst>
+              <a:ext uri="{28A0092B-C50C-407E-A947-70E740481C1C}">
+                <a14:useLocalDpi xmlns:a14="http://schemas.microsoft.com/office/drawing/2010/main" val="0"/>
+              </a:ext>
+            </a:extLst>
+          </a:blip>
+          <a:srcRect b="68125"/>
+          <a:stretch>
+            <a:fillRect/>
+          </a:stretch>
+        </p:blipFill>
+        <p:spPr>
+          <a:xfrm>
+            <a:off x="4567177" y="933102"/>
+            <a:ext cx="7429978" cy="2125508"/>
+          </a:xfrm>
+          <a:prstGeom prst="rect">
+            <a:avLst/>
+          </a:prstGeom>
+        </p:spPr>
+      </p:pic>
+    </p:spTree>
+    <p:extLst>
+      <p:ext uri="{BB962C8B-B14F-4D97-AF65-F5344CB8AC3E}">
+        <p14:creationId xmlns:p14="http://schemas.microsoft.com/office/powerpoint/2010/main" val="1962361487"/>
+      </p:ext>
+    </p:extLst>
+  </p:cSld>
+  <p:clrMapOvr>
+    <a:masterClrMapping/>
+  </p:clrMapOvr>
+</p:sld>
+</file>
+
+<file path=ppt/slides/slide14.xml><?xml version="1.0" encoding="utf-8"?>
+<p:sld xmlns:a="http://schemas.openxmlformats.org/drawingml/2006/main" xmlns:r="http://schemas.openxmlformats.org/officeDocument/2006/relationships" xmlns:p="http://schemas.openxmlformats.org/presentationml/2006/main">
+  <p:cSld>
+    <p:spTree>
+      <p:nvGrpSpPr>
+        <p:cNvPr id="1" name=""/>
+        <p:cNvGrpSpPr/>
+        <p:nvPr/>
+      </p:nvGrpSpPr>
+      <p:grpSpPr>
+        <a:xfrm>
+          <a:off x="0" y="0"/>
+          <a:ext cx="0" cy="0"/>
+          <a:chOff x="0" y="0"/>
+          <a:chExt cx="0" cy="0"/>
+        </a:xfrm>
+      </p:grpSpPr>
+      <p:sp>
+        <p:nvSpPr>
+          <p:cNvPr id="3" name="Content Placeholder 2">
+            <a:extLst>
+              <a:ext uri="{FF2B5EF4-FFF2-40B4-BE49-F238E27FC236}">
+                <a16:creationId xmlns:a16="http://schemas.microsoft.com/office/drawing/2014/main" id="{A9A5BFCD-5262-E44C-A79E-33C3A18FF87C}"/>
+              </a:ext>
+            </a:extLst>
+          </p:cNvPr>
+          <p:cNvSpPr>
+            <a:spLocks noGrp="1"/>
+          </p:cNvSpPr>
+          <p:nvPr>
+            <p:ph idx="1"/>
+          </p:nvPr>
+        </p:nvSpPr>
+        <p:spPr>
+          <a:xfrm>
+            <a:off x="142240" y="294640"/>
+            <a:ext cx="4638104" cy="6410960"/>
+          </a:xfrm>
+        </p:spPr>
+        <p:txBody>
+          <a:bodyPr>
+            <a:normAutofit/>
+          </a:bodyPr>
+          <a:lstStyle/>
+          <a:p>
+            <a:r>
+              <a:rPr lang="en-US" sz="3200" b="0" i="0" u="none" strike="noStrike" baseline="0" dirty="0">
+                <a:solidFill>
+                  <a:srgbClr val="221E1F"/>
+                </a:solidFill>
+                <a:latin typeface="+mj-lt"/>
+              </a:rPr>
+              <a:t>Approach of COVAX </a:t>
+            </a:r>
+            <a:r>
+              <a:rPr lang="en-US" sz="3200" dirty="0">
+                <a:solidFill>
+                  <a:srgbClr val="221E1F"/>
+                </a:solidFill>
+                <a:latin typeface="+mj-lt"/>
+              </a:rPr>
+              <a:t>criticized as </a:t>
+            </a:r>
+            <a:r>
+              <a:rPr lang="en-US" sz="3200" b="0" i="0" u="none" strike="noStrike" baseline="0" dirty="0">
+                <a:solidFill>
+                  <a:srgbClr val="221E1F"/>
+                </a:solidFill>
+                <a:latin typeface="+mj-lt"/>
+              </a:rPr>
+              <a:t>short-term fix rather than long-term solution</a:t>
+            </a:r>
+          </a:p>
+          <a:p>
+            <a:r>
+              <a:rPr lang="en-US" sz="3200" dirty="0">
+                <a:solidFill>
+                  <a:srgbClr val="221E1F"/>
+                </a:solidFill>
+                <a:latin typeface="+mj-lt"/>
+              </a:rPr>
+              <a:t>COVAX had good aims but addressed symptom of deeper problem instead of underlying cause</a:t>
+            </a:r>
+          </a:p>
+          <a:p>
+            <a:r>
+              <a:rPr lang="en-US" sz="3200" dirty="0">
+                <a:solidFill>
+                  <a:srgbClr val="221E1F"/>
+                </a:solidFill>
+                <a:latin typeface="+mj-lt"/>
+              </a:rPr>
+              <a:t>Releasing patents so that other countries could make the mRNA vaccine would have helped</a:t>
+            </a:r>
+          </a:p>
+        </p:txBody>
+      </p:sp>
+      <p:pic>
+        <p:nvPicPr>
+          <p:cNvPr id="4" name="Picture 3">
+            <a:extLst>
+              <a:ext uri="{FF2B5EF4-FFF2-40B4-BE49-F238E27FC236}">
+                <a16:creationId xmlns:a16="http://schemas.microsoft.com/office/drawing/2014/main" id="{DB0E1637-9D50-C242-8E8B-78ABC7B1CADC}"/>
+              </a:ext>
+            </a:extLst>
+          </p:cNvPr>
+          <p:cNvPicPr>
+            <a:picLocks noChangeAspect="1"/>
+          </p:cNvPicPr>
+          <p:nvPr/>
+        </p:nvPicPr>
+        <p:blipFill>
+          <a:blip r:embed="rId3"/>
+          <a:stretch>
+            <a:fillRect/>
+          </a:stretch>
+        </p:blipFill>
+        <p:spPr>
+          <a:xfrm>
+            <a:off x="5234907" y="294640"/>
+            <a:ext cx="6814853" cy="1510714"/>
+          </a:xfrm>
+          <a:prstGeom prst="rect">
+            <a:avLst/>
+          </a:prstGeom>
+        </p:spPr>
+      </p:pic>
+      <p:pic>
+        <p:nvPicPr>
+          <p:cNvPr id="9" name="Picture 8" descr="A group of people holding signs&#10;&#10;Description automatically generated with medium confidence">
+            <a:extLst>
+              <a:ext uri="{FF2B5EF4-FFF2-40B4-BE49-F238E27FC236}">
+                <a16:creationId xmlns:a16="http://schemas.microsoft.com/office/drawing/2014/main" id="{B07AA799-A908-C8F3-3657-F288DAAEDEAB}"/>
+              </a:ext>
+            </a:extLst>
+          </p:cNvPr>
+          <p:cNvPicPr>
+            <a:picLocks noChangeAspect="1"/>
+          </p:cNvPicPr>
+          <p:nvPr/>
+        </p:nvPicPr>
+        <p:blipFill>
+          <a:blip r:embed="rId4">
+            <a:extLst>
+              <a:ext uri="{28A0092B-C50C-407E-A947-70E740481C1C}">
+                <a14:useLocalDpi xmlns:a14="http://schemas.microsoft.com/office/drawing/2010/main" val="0"/>
+              </a:ext>
+            </a:extLst>
+          </a:blip>
+          <a:stretch>
+            <a:fillRect/>
+          </a:stretch>
+        </p:blipFill>
+        <p:spPr>
+          <a:xfrm>
+            <a:off x="5375983" y="2036618"/>
+            <a:ext cx="6320247" cy="4211348"/>
+          </a:xfrm>
+          <a:prstGeom prst="rect">
+            <a:avLst/>
+          </a:prstGeom>
+        </p:spPr>
+      </p:pic>
+    </p:spTree>
+    <p:extLst>
+      <p:ext uri="{BB962C8B-B14F-4D97-AF65-F5344CB8AC3E}">
+        <p14:creationId xmlns:p14="http://schemas.microsoft.com/office/powerpoint/2010/main" val="3655346971"/>
+      </p:ext>
+    </p:extLst>
+  </p:cSld>
+  <p:clrMapOvr>
+    <a:masterClrMapping/>
+  </p:clrMapOvr>
+</p:sld>
+</file>
+
+<file path=ppt/slides/slide15.xml><?xml version="1.0" encoding="utf-8"?>
+<p:sld xmlns:a="http://schemas.openxmlformats.org/drawingml/2006/main" xmlns:r="http://schemas.openxmlformats.org/officeDocument/2006/relationships" xmlns:p="http://schemas.openxmlformats.org/presentationml/2006/main">
+  <p:cSld>
+    <p:spTree>
+      <p:nvGrpSpPr>
+        <p:cNvPr id="1" name=""/>
+        <p:cNvGrpSpPr/>
+        <p:nvPr/>
+      </p:nvGrpSpPr>
+      <p:grpSpPr>
+        <a:xfrm>
+          <a:off x="0" y="0"/>
+          <a:ext cx="0" cy="0"/>
+          <a:chOff x="0" y="0"/>
+          <a:chExt cx="0" cy="0"/>
+        </a:xfrm>
+      </p:grpSpPr>
+      <p:sp>
+        <p:nvSpPr>
+          <p:cNvPr id="2" name="Title 1">
+            <a:extLst>
+              <a:ext uri="{FF2B5EF4-FFF2-40B4-BE49-F238E27FC236}">
+                <a16:creationId xmlns:a16="http://schemas.microsoft.com/office/drawing/2014/main" id="{7A5A85DC-4293-47A2-A7F7-7276CBE921B4}"/>
+              </a:ext>
+            </a:extLst>
+          </p:cNvPr>
+          <p:cNvSpPr>
+            <a:spLocks noGrp="1"/>
+          </p:cNvSpPr>
+          <p:nvPr>
+            <p:ph type="title"/>
+          </p:nvPr>
+        </p:nvSpPr>
+        <p:spPr>
+          <a:xfrm>
+            <a:off x="459956" y="365125"/>
+            <a:ext cx="11010900" cy="1325563"/>
+          </a:xfrm>
+        </p:spPr>
+        <p:txBody>
+          <a:bodyPr>
+            <a:normAutofit/>
+          </a:bodyPr>
+          <a:lstStyle/>
+          <a:p>
+            <a:pPr algn="ctr"/>
+            <a:r>
+              <a:rPr lang="en-US" dirty="0"/>
+              <a:t>Global cooperation aided the design and manufacture of mRNA Covid vaccines</a:t>
+            </a:r>
+          </a:p>
+        </p:txBody>
+      </p:sp>
+      <p:pic>
+        <p:nvPicPr>
+          <p:cNvPr id="5" name="Content Placeholder 4">
+            <a:extLst>
+              <a:ext uri="{FF2B5EF4-FFF2-40B4-BE49-F238E27FC236}">
+                <a16:creationId xmlns:a16="http://schemas.microsoft.com/office/drawing/2014/main" id="{5C202F22-5FCE-4041-B1F6-6B5D11F991AF}"/>
+              </a:ext>
+            </a:extLst>
+          </p:cNvPr>
+          <p:cNvPicPr>
+            <a:picLocks noGrp="1" noChangeAspect="1"/>
+          </p:cNvPicPr>
+          <p:nvPr>
+            <p:ph idx="1"/>
+          </p:nvPr>
+        </p:nvPicPr>
+        <p:blipFill>
+          <a:blip r:embed="rId3"/>
+          <a:stretch>
+            <a:fillRect/>
+          </a:stretch>
+        </p:blipFill>
+        <p:spPr>
+          <a:xfrm>
+            <a:off x="3783208" y="1865578"/>
+            <a:ext cx="8677310" cy="4627297"/>
+          </a:xfrm>
+        </p:spPr>
+      </p:pic>
+      <p:sp>
+        <p:nvSpPr>
+          <p:cNvPr id="3" name="Rectangle 2">
+            <a:extLst>
+              <a:ext uri="{FF2B5EF4-FFF2-40B4-BE49-F238E27FC236}">
+                <a16:creationId xmlns:a16="http://schemas.microsoft.com/office/drawing/2014/main" id="{9E18D254-E7C1-488A-BDF3-8D237EDC2A50}"/>
+              </a:ext>
+            </a:extLst>
+          </p:cNvPr>
+          <p:cNvSpPr/>
+          <p:nvPr/>
+        </p:nvSpPr>
+        <p:spPr>
+          <a:xfrm>
+            <a:off x="3548743" y="5606143"/>
+            <a:ext cx="1001486" cy="489857"/>
+          </a:xfrm>
+          <a:prstGeom prst="rect">
+            <a:avLst/>
+          </a:prstGeom>
+          <a:solidFill>
+            <a:schemeClr val="bg1"/>
+          </a:solidFill>
+          <a:ln>
+            <a:noFill/>
+          </a:ln>
+        </p:spPr>
+        <p:style>
+          <a:lnRef idx="2">
+            <a:schemeClr val="accent1">
+              <a:shade val="50000"/>
+            </a:schemeClr>
+          </a:lnRef>
+          <a:fillRef idx="1">
+            <a:schemeClr val="accent1"/>
+          </a:fillRef>
+          <a:effectRef idx="0">
+            <a:schemeClr val="accent1"/>
+          </a:effectRef>
+          <a:fontRef idx="minor">
+            <a:schemeClr val="lt1"/>
+          </a:fontRef>
+        </p:style>
+        <p:txBody>
+          <a:bodyPr rtlCol="0" anchor="ctr"/>
+          <a:lstStyle/>
+          <a:p>
+            <a:pPr algn="ctr"/>
+            <a:endParaRPr lang="en-US" dirty="0"/>
+          </a:p>
+        </p:txBody>
+      </p:sp>
+      <p:sp>
+        <p:nvSpPr>
+          <p:cNvPr id="6" name="Content Placeholder 2">
+            <a:extLst>
+              <a:ext uri="{FF2B5EF4-FFF2-40B4-BE49-F238E27FC236}">
+                <a16:creationId xmlns:a16="http://schemas.microsoft.com/office/drawing/2014/main" id="{C61972A7-B2E2-4845-84A3-9A6890F62F8F}"/>
+              </a:ext>
+            </a:extLst>
+          </p:cNvPr>
+          <p:cNvSpPr txBox="1">
+            <a:spLocks/>
+          </p:cNvSpPr>
+          <p:nvPr/>
+        </p:nvSpPr>
+        <p:spPr>
+          <a:xfrm>
+            <a:off x="171321" y="1865578"/>
+            <a:ext cx="3509428" cy="4627297"/>
+          </a:xfrm>
+          <a:prstGeom prst="rect">
+            <a:avLst/>
+          </a:prstGeom>
+        </p:spPr>
+        <p:txBody>
+          <a:bodyPr vert="horz" lIns="91440" tIns="45720" rIns="91440" bIns="45720" rtlCol="0">
+            <a:normAutofit fontScale="92500"/>
+          </a:bodyPr>
+          <a:lstStyle>
+            <a:lvl1pPr marL="228600" indent="-228600" algn="l" defTabSz="914400" rtl="0" eaLnBrk="1" latinLnBrk="0" hangingPunct="1">
+              <a:lnSpc>
+                <a:spcPct val="90000"/>
+              </a:lnSpc>
+              <a:spcBef>
+                <a:spcPts val="1000"/>
+              </a:spcBef>
+              <a:buFont typeface="Arial" panose="020B0604020202020204" pitchFamily="34" charset="0"/>
+              <a:buChar char="•"/>
+              <a:defRPr sz="2800" kern="1200">
+                <a:solidFill>
+                  <a:schemeClr val="tx1"/>
+                </a:solidFill>
+                <a:latin typeface="+mn-lt"/>
+                <a:ea typeface="+mn-ea"/>
+                <a:cs typeface="+mn-cs"/>
+              </a:defRPr>
+            </a:lvl1pPr>
+            <a:lvl2pPr marL="685800" indent="-228600" algn="l" defTabSz="914400" rtl="0" eaLnBrk="1" latinLnBrk="0" hangingPunct="1">
+              <a:lnSpc>
+                <a:spcPct val="90000"/>
+              </a:lnSpc>
+              <a:spcBef>
+                <a:spcPts val="500"/>
+              </a:spcBef>
+              <a:buFont typeface="Arial" panose="020B0604020202020204" pitchFamily="34" charset="0"/>
+              <a:buChar char="•"/>
+              <a:defRPr sz="2400" kern="1200">
+                <a:solidFill>
+                  <a:schemeClr val="tx1"/>
+                </a:solidFill>
+                <a:latin typeface="+mn-lt"/>
+                <a:ea typeface="+mn-ea"/>
+                <a:cs typeface="+mn-cs"/>
+              </a:defRPr>
+            </a:lvl2pPr>
+            <a:lvl3pPr marL="1143000" indent="-228600" algn="l" defTabSz="914400" rtl="0" eaLnBrk="1" latinLnBrk="0" hangingPunct="1">
+              <a:lnSpc>
+                <a:spcPct val="90000"/>
+              </a:lnSpc>
+              <a:spcBef>
+                <a:spcPts val="500"/>
+              </a:spcBef>
+              <a:buFont typeface="Arial" panose="020B0604020202020204" pitchFamily="34" charset="0"/>
+              <a:buChar char="•"/>
+              <a:defRPr sz="2000" kern="1200">
+                <a:solidFill>
+                  <a:schemeClr val="tx1"/>
+                </a:solidFill>
+                <a:latin typeface="+mn-lt"/>
+                <a:ea typeface="+mn-ea"/>
+                <a:cs typeface="+mn-cs"/>
+              </a:defRPr>
+            </a:lvl3pPr>
+            <a:lvl4pPr marL="1600200" indent="-228600" algn="l" defTabSz="914400" rtl="0" eaLnBrk="1" latinLnBrk="0" hangingPunct="1">
+              <a:lnSpc>
+                <a:spcPct val="90000"/>
+              </a:lnSpc>
+              <a:spcBef>
+                <a:spcPts val="500"/>
+              </a:spcBef>
+              <a:buFont typeface="Arial" panose="020B0604020202020204" pitchFamily="34" charset="0"/>
+              <a:buChar char="•"/>
+              <a:defRPr sz="1800" kern="1200">
+                <a:solidFill>
+                  <a:schemeClr val="tx1"/>
+                </a:solidFill>
+                <a:latin typeface="+mn-lt"/>
+                <a:ea typeface="+mn-ea"/>
+                <a:cs typeface="+mn-cs"/>
+              </a:defRPr>
+            </a:lvl4pPr>
+            <a:lvl5pPr marL="2057400" indent="-228600" algn="l" defTabSz="914400" rtl="0" eaLnBrk="1" latinLnBrk="0" hangingPunct="1">
+              <a:lnSpc>
+                <a:spcPct val="90000"/>
+              </a:lnSpc>
+              <a:spcBef>
+                <a:spcPts val="500"/>
+              </a:spcBef>
+              <a:buFont typeface="Arial" panose="020B0604020202020204" pitchFamily="34" charset="0"/>
+              <a:buChar char="•"/>
+              <a:defRPr sz="1800" kern="1200">
+                <a:solidFill>
+                  <a:schemeClr val="tx1"/>
+                </a:solidFill>
+                <a:latin typeface="+mn-lt"/>
+                <a:ea typeface="+mn-ea"/>
+                <a:cs typeface="+mn-cs"/>
+              </a:defRPr>
+            </a:lvl5pPr>
+            <a:lvl6pPr marL="2514600" indent="-228600" algn="l" defTabSz="914400" rtl="0" eaLnBrk="1" latinLnBrk="0" hangingPunct="1">
+              <a:lnSpc>
+                <a:spcPct val="90000"/>
+              </a:lnSpc>
+              <a:spcBef>
+                <a:spcPts val="500"/>
+              </a:spcBef>
+              <a:buFont typeface="Arial" panose="020B0604020202020204" pitchFamily="34" charset="0"/>
+              <a:buChar char="•"/>
+              <a:defRPr sz="1800" kern="1200">
+                <a:solidFill>
+                  <a:schemeClr val="tx1"/>
+                </a:solidFill>
+                <a:latin typeface="+mn-lt"/>
+                <a:ea typeface="+mn-ea"/>
+                <a:cs typeface="+mn-cs"/>
+              </a:defRPr>
+            </a:lvl6pPr>
+            <a:lvl7pPr marL="2971800" indent="-228600" algn="l" defTabSz="914400" rtl="0" eaLnBrk="1" latinLnBrk="0" hangingPunct="1">
+              <a:lnSpc>
+                <a:spcPct val="90000"/>
+              </a:lnSpc>
+              <a:spcBef>
+                <a:spcPts val="500"/>
+              </a:spcBef>
+              <a:buFont typeface="Arial" panose="020B0604020202020204" pitchFamily="34" charset="0"/>
+              <a:buChar char="•"/>
+              <a:defRPr sz="1800" kern="1200">
+                <a:solidFill>
+                  <a:schemeClr val="tx1"/>
+                </a:solidFill>
+                <a:latin typeface="+mn-lt"/>
+                <a:ea typeface="+mn-ea"/>
+                <a:cs typeface="+mn-cs"/>
+              </a:defRPr>
+            </a:lvl7pPr>
+            <a:lvl8pPr marL="3429000" indent="-228600" algn="l" defTabSz="914400" rtl="0" eaLnBrk="1" latinLnBrk="0" hangingPunct="1">
+              <a:lnSpc>
+                <a:spcPct val="90000"/>
+              </a:lnSpc>
+              <a:spcBef>
+                <a:spcPts val="500"/>
+              </a:spcBef>
+              <a:buFont typeface="Arial" panose="020B0604020202020204" pitchFamily="34" charset="0"/>
+              <a:buChar char="•"/>
+              <a:defRPr sz="1800" kern="1200">
+                <a:solidFill>
+                  <a:schemeClr val="tx1"/>
+                </a:solidFill>
+                <a:latin typeface="+mn-lt"/>
+                <a:ea typeface="+mn-ea"/>
+                <a:cs typeface="+mn-cs"/>
+              </a:defRPr>
+            </a:lvl8pPr>
+            <a:lvl9pPr marL="3886200" indent="-228600" algn="l" defTabSz="914400" rtl="0" eaLnBrk="1" latinLnBrk="0" hangingPunct="1">
+              <a:lnSpc>
+                <a:spcPct val="90000"/>
+              </a:lnSpc>
+              <a:spcBef>
+                <a:spcPts val="500"/>
+              </a:spcBef>
+              <a:buFont typeface="Arial" panose="020B0604020202020204" pitchFamily="34" charset="0"/>
+              <a:buChar char="•"/>
+              <a:defRPr sz="1800" kern="1200">
+                <a:solidFill>
+                  <a:schemeClr val="tx1"/>
+                </a:solidFill>
+                <a:latin typeface="+mn-lt"/>
+                <a:ea typeface="+mn-ea"/>
+                <a:cs typeface="+mn-cs"/>
+              </a:defRPr>
+            </a:lvl9pPr>
+          </a:lstStyle>
+          <a:p>
+            <a:r>
+              <a:rPr lang="en-US" dirty="0"/>
+              <a:t>The Pfizer (US) mRNA vaccine took less than a year to bring to market.</a:t>
+            </a:r>
+          </a:p>
+          <a:p>
+            <a:r>
+              <a:rPr lang="en-US" dirty="0"/>
+              <a:t>Prior, fastest development of a vaccine was for mumps, which took four years</a:t>
+            </a:r>
+          </a:p>
+          <a:p>
+            <a:r>
+              <a:rPr lang="en-US" dirty="0"/>
+              <a:t>Ties across countries around the world were necessary to do this</a:t>
+            </a:r>
+          </a:p>
+        </p:txBody>
+      </p:sp>
+    </p:spTree>
+    <p:extLst>
+      <p:ext uri="{BB962C8B-B14F-4D97-AF65-F5344CB8AC3E}">
+        <p14:creationId xmlns:p14="http://schemas.microsoft.com/office/powerpoint/2010/main" val="923221145"/>
+      </p:ext>
+    </p:extLst>
+  </p:cSld>
+  <p:clrMapOvr>
+    <a:masterClrMapping/>
+  </p:clrMapOvr>
+</p:sld>
+</file>
+
+<file path=ppt/slides/slide16.xml><?xml version="1.0" encoding="utf-8"?>
+<p:sld xmlns:a="http://schemas.openxmlformats.org/drawingml/2006/main" xmlns:r="http://schemas.openxmlformats.org/officeDocument/2006/relationships" xmlns:p="http://schemas.openxmlformats.org/presentationml/2006/main">
+  <p:cSld>
+    <p:spTree>
+      <p:nvGrpSpPr>
+        <p:cNvPr id="1" name=""/>
+        <p:cNvGrpSpPr/>
+        <p:nvPr/>
+      </p:nvGrpSpPr>
+      <p:grpSpPr>
+        <a:xfrm>
+          <a:off x="0" y="0"/>
+          <a:ext cx="0" cy="0"/>
+          <a:chOff x="0" y="0"/>
+          <a:chExt cx="0" cy="0"/>
+        </a:xfrm>
+      </p:grpSpPr>
+      <p:pic>
+        <p:nvPicPr>
+          <p:cNvPr id="5" name="Content Placeholder 4">
+            <a:hlinkClick r:id="rId3"/>
+            <a:extLst>
+              <a:ext uri="{FF2B5EF4-FFF2-40B4-BE49-F238E27FC236}">
+                <a16:creationId xmlns:a16="http://schemas.microsoft.com/office/drawing/2014/main" id="{12E94A94-BAEE-49BE-9459-C27901B864AC}"/>
+              </a:ext>
+            </a:extLst>
+          </p:cNvPr>
+          <p:cNvPicPr>
+            <a:picLocks noGrp="1" noChangeAspect="1"/>
+          </p:cNvPicPr>
+          <p:nvPr>
+            <p:ph idx="1"/>
+          </p:nvPr>
+        </p:nvPicPr>
+        <p:blipFill>
+          <a:blip r:embed="rId4"/>
+          <a:stretch>
+            <a:fillRect/>
+          </a:stretch>
+        </p:blipFill>
+        <p:spPr>
+          <a:xfrm>
+            <a:off x="1034144" y="1910812"/>
+            <a:ext cx="10308771" cy="4747389"/>
+          </a:xfrm>
+          <a:ln w="69850">
+            <a:solidFill>
+              <a:schemeClr val="accent1"/>
+            </a:solidFill>
+          </a:ln>
+        </p:spPr>
+      </p:pic>
+      <p:sp>
+        <p:nvSpPr>
+          <p:cNvPr id="4" name="Title 1">
+            <a:extLst>
+              <a:ext uri="{FF2B5EF4-FFF2-40B4-BE49-F238E27FC236}">
+                <a16:creationId xmlns:a16="http://schemas.microsoft.com/office/drawing/2014/main" id="{696071C3-CB7D-4681-B92C-EFB836F0F3E3}"/>
+              </a:ext>
+            </a:extLst>
+          </p:cNvPr>
+          <p:cNvSpPr>
+            <a:spLocks noGrp="1"/>
+          </p:cNvSpPr>
+          <p:nvPr>
+            <p:ph type="title"/>
+          </p:nvPr>
+        </p:nvSpPr>
+        <p:spPr>
+          <a:xfrm>
+            <a:off x="413657" y="365125"/>
+            <a:ext cx="11010900" cy="1325563"/>
+          </a:xfrm>
+        </p:spPr>
+        <p:txBody>
+          <a:bodyPr>
+            <a:normAutofit fontScale="90000"/>
+          </a:bodyPr>
+          <a:lstStyle/>
+          <a:p>
+            <a:pPr algn="ctr"/>
+            <a:r>
+              <a:rPr lang="en-US" dirty="0"/>
+              <a:t>Pfizer mRNA vaccine invented by German company </a:t>
+            </a:r>
+            <a:r>
+              <a:rPr lang="en-US" dirty="0">
+                <a:hlinkClick r:id="rId5"/>
+              </a:rPr>
+              <a:t>BioNTech</a:t>
+            </a:r>
+            <a:r>
+              <a:rPr lang="en-US" dirty="0"/>
+              <a:t> started by Turkish immigrants </a:t>
+            </a:r>
+          </a:p>
+        </p:txBody>
+      </p:sp>
+    </p:spTree>
+    <p:extLst>
+      <p:ext uri="{BB962C8B-B14F-4D97-AF65-F5344CB8AC3E}">
+        <p14:creationId xmlns:p14="http://schemas.microsoft.com/office/powerpoint/2010/main" val="3313587685"/>
+      </p:ext>
+    </p:extLst>
+  </p:cSld>
+  <p:clrMapOvr>
+    <a:masterClrMapping/>
+  </p:clrMapOvr>
+</p:sld>
+</file>
+
+<file path=ppt/slides/slide17.xml><?xml version="1.0" encoding="utf-8"?>
+<p:sld xmlns:a="http://schemas.openxmlformats.org/drawingml/2006/main" xmlns:r="http://schemas.openxmlformats.org/officeDocument/2006/relationships" xmlns:p="http://schemas.openxmlformats.org/presentationml/2006/main">
+  <p:cSld>
+    <p:spTree>
+      <p:nvGrpSpPr>
+        <p:cNvPr id="1" name=""/>
+        <p:cNvGrpSpPr/>
+        <p:nvPr/>
+      </p:nvGrpSpPr>
+      <p:grpSpPr>
+        <a:xfrm>
+          <a:off x="0" y="0"/>
+          <a:ext cx="0" cy="0"/>
+          <a:chOff x="0" y="0"/>
+          <a:chExt cx="0" cy="0"/>
+        </a:xfrm>
+      </p:grpSpPr>
+      <p:sp>
+        <p:nvSpPr>
+          <p:cNvPr id="2" name="Title 1">
+            <a:extLst>
+              <a:ext uri="{FF2B5EF4-FFF2-40B4-BE49-F238E27FC236}">
+                <a16:creationId xmlns:a16="http://schemas.microsoft.com/office/drawing/2014/main" id="{7DD04BFD-01F3-7CCC-9017-26F5924ABCEE}"/>
+              </a:ext>
+            </a:extLst>
+          </p:cNvPr>
+          <p:cNvSpPr>
+            <a:spLocks noGrp="1"/>
+          </p:cNvSpPr>
+          <p:nvPr>
+            <p:ph type="title"/>
+          </p:nvPr>
+        </p:nvSpPr>
+        <p:spPr>
+          <a:xfrm>
+            <a:off x="6324598" y="365125"/>
+            <a:ext cx="5354256" cy="1325563"/>
+          </a:xfrm>
+        </p:spPr>
+        <p:txBody>
+          <a:bodyPr/>
+          <a:lstStyle/>
+          <a:p>
+            <a:pPr algn="ctr"/>
+            <a:r>
+              <a:rPr lang="en-US" dirty="0"/>
+              <a:t>Advantages of mRNA vaccines</a:t>
+            </a:r>
+          </a:p>
+        </p:txBody>
+      </p:sp>
+      <p:sp>
+        <p:nvSpPr>
+          <p:cNvPr id="3" name="Content Placeholder 2">
+            <a:extLst>
+              <a:ext uri="{FF2B5EF4-FFF2-40B4-BE49-F238E27FC236}">
+                <a16:creationId xmlns:a16="http://schemas.microsoft.com/office/drawing/2014/main" id="{B4516308-992E-CF39-E5A3-C5C5728FD52E}"/>
+              </a:ext>
+            </a:extLst>
+          </p:cNvPr>
+          <p:cNvSpPr>
+            <a:spLocks noGrp="1"/>
+          </p:cNvSpPr>
+          <p:nvPr>
+            <p:ph idx="1"/>
+          </p:nvPr>
+        </p:nvSpPr>
+        <p:spPr>
+          <a:xfrm>
+            <a:off x="513145" y="365125"/>
+            <a:ext cx="5354257" cy="5811838"/>
+          </a:xfrm>
+        </p:spPr>
+        <p:txBody>
+          <a:bodyPr>
+            <a:normAutofit/>
+          </a:bodyPr>
+          <a:lstStyle/>
+          <a:p>
+            <a:r>
+              <a:rPr lang="en-US" dirty="0"/>
+              <a:t>Can be designed and manufactured faster than traditional methods (they require mammalian cell cultures or chicken eggs)</a:t>
+            </a:r>
+          </a:p>
+          <a:p>
+            <a:r>
+              <a:rPr lang="en-US" dirty="0"/>
+              <a:t>Fewer impurities</a:t>
+            </a:r>
+          </a:p>
+          <a:p>
+            <a:r>
+              <a:rPr lang="en-US" dirty="0"/>
+              <a:t>Allows for faster response to  disease outbreak</a:t>
+            </a:r>
+          </a:p>
+          <a:p>
+            <a:r>
+              <a:rPr lang="en-US" dirty="0"/>
+              <a:t>Do not contain any live or weakened virus</a:t>
+            </a:r>
+          </a:p>
+          <a:p>
+            <a:r>
+              <a:rPr lang="en-US" dirty="0"/>
+              <a:t>Induces strong immune response</a:t>
+            </a:r>
+          </a:p>
+          <a:p>
+            <a:r>
+              <a:rPr lang="en-US" dirty="0"/>
+              <a:t>The technology won a Nobel Prize in Physiology or Medicine in 2023</a:t>
+            </a:r>
+          </a:p>
+          <a:p>
+            <a:endParaRPr lang="en-US" dirty="0"/>
+          </a:p>
+        </p:txBody>
+      </p:sp>
+      <p:pic>
+        <p:nvPicPr>
+          <p:cNvPr id="5" name="Online Media 3" title="How mRNA Vaccines Work | Penn Medicine Explains">
+            <a:hlinkClick r:id="" action="ppaction://media"/>
+            <a:extLst>
+              <a:ext uri="{FF2B5EF4-FFF2-40B4-BE49-F238E27FC236}">
+                <a16:creationId xmlns:a16="http://schemas.microsoft.com/office/drawing/2014/main" id="{24A1BA63-1C2C-E47C-4016-5F1E9B8D32BD}"/>
+              </a:ext>
+            </a:extLst>
+          </p:cNvPr>
+          <p:cNvPicPr>
+            <a:picLocks noRot="1" noChangeAspect="1"/>
+          </p:cNvPicPr>
+          <p:nvPr>
+            <a:videoFile r:link="rId1"/>
+          </p:nvPr>
+        </p:nvPicPr>
+        <p:blipFill>
+          <a:blip r:embed="rId4"/>
+          <a:srcRect l="14575" r="11826"/>
+          <a:stretch>
+            <a:fillRect/>
+          </a:stretch>
+        </p:blipFill>
+        <p:spPr>
+          <a:xfrm>
+            <a:off x="6324599" y="1825625"/>
+            <a:ext cx="5354256" cy="4107238"/>
+          </a:xfrm>
+          <a:prstGeom prst="rect">
+            <a:avLst/>
+          </a:prstGeom>
+        </p:spPr>
+      </p:pic>
+    </p:spTree>
+    <p:extLst>
+      <p:ext uri="{BB962C8B-B14F-4D97-AF65-F5344CB8AC3E}">
+        <p14:creationId xmlns:p14="http://schemas.microsoft.com/office/powerpoint/2010/main" val="1712653412"/>
+      </p:ext>
+    </p:extLst>
+  </p:cSld>
+  <p:clrMapOvr>
+    <a:masterClrMapping/>
+  </p:clrMapOvr>
+  <p:timing>
+    <p:tnLst>
+      <p:par>
+        <p:cTn id="1" dur="indefinite" restart="never" nodeType="tmRoot">
+          <p:childTnLst>
+            <p:seq concurrent="1" nextAc="seek">
+              <p:cTn id="2" dur="indefinite" nodeType="mainSeq">
+                <p:childTnLst>
+                  <p:par>
+                    <p:cTn id="3" fill="hold">
+                      <p:stCondLst>
+                        <p:cond delay="indefinite"/>
+                      </p:stCondLst>
+                      <p:childTnLst>
+                        <p:par>
+                          <p:cTn id="4" fill="hold">
+                            <p:stCondLst>
+                              <p:cond delay="0"/>
+                            </p:stCondLst>
+                            <p:childTnLst>
+                              <p:par>
+                                <p:cTn id="5" presetID="1" presetClass="mediacall" presetSubtype="0" fill="hold" nodeType="clickEffect">
+                                  <p:stCondLst>
+                                    <p:cond delay="0"/>
+                                  </p:stCondLst>
+                                  <p:childTnLst>
+                                    <p:cmd type="call" cmd="playFrom(0.0)">
+                                      <p:cBhvr>
+                                        <p:cTn id="6" dur="1" fill="hold"/>
+                                        <p:tgtEl>
+                                          <p:spTgt spid="5"/>
+                                        </p:tgtEl>
+                                      </p:cBhvr>
+                                    </p:cmd>
+                                  </p:childTnLst>
+                                </p:cTn>
+                              </p:par>
+                            </p:childTnLst>
+                          </p:cTn>
+                        </p:par>
+                      </p:childTnLst>
+                    </p:cTn>
+                  </p:par>
+                </p:childTnLst>
+              </p:cTn>
+              <p:prevCondLst>
+                <p:cond evt="onPrev" delay="0">
+                  <p:tgtEl>
+                    <p:sldTgt/>
+                  </p:tgtEl>
+                </p:cond>
+              </p:prevCondLst>
+              <p:nextCondLst>
+                <p:cond evt="onNext" delay="0">
+                  <p:tgtEl>
+                    <p:sldTgt/>
+                  </p:tgtEl>
+                </p:cond>
+              </p:nextCondLst>
+            </p:seq>
+            <p:seq concurrent="1" nextAc="seek">
+              <p:cTn id="7" restart="whenNotActive" fill="hold" evtFilter="cancelBubble" nodeType="interactiveSeq">
+                <p:stCondLst>
+                  <p:cond evt="onClick" delay="0">
+                    <p:tgtEl>
+                      <p:spTgt spid="5"/>
+                    </p:tgtEl>
+                  </p:cond>
+                </p:stCondLst>
+                <p:endSync evt="end" delay="0">
+                  <p:rtn val="all"/>
+                </p:endSync>
+                <p:childTnLst>
+                  <p:par>
+                    <p:cTn id="8" fill="hold">
+                      <p:stCondLst>
+                        <p:cond delay="0"/>
+                      </p:stCondLst>
+                      <p:childTnLst>
+                        <p:par>
+                          <p:cTn id="9" fill="hold">
+                            <p:stCondLst>
+                              <p:cond delay="0"/>
+                            </p:stCondLst>
+                            <p:childTnLst>
+                              <p:par>
+                                <p:cTn id="10" presetID="2" presetClass="mediacall" presetSubtype="0" fill="hold" nodeType="clickEffect">
+                                  <p:stCondLst>
+                                    <p:cond delay="0"/>
+                                  </p:stCondLst>
+                                  <p:childTnLst>
+                                    <p:cmd type="call" cmd="togglePause">
+                                      <p:cBhvr>
+                                        <p:cTn id="11" dur="1" fill="hold"/>
+                                        <p:tgtEl>
+                                          <p:spTgt spid="5"/>
+                                        </p:tgtEl>
+                                      </p:cBhvr>
+                                    </p:cmd>
+                                  </p:childTnLst>
+                                </p:cTn>
+                              </p:par>
+                            </p:childTnLst>
+                          </p:cTn>
+                        </p:par>
+                      </p:childTnLst>
+                    </p:cTn>
+                  </p:par>
+                </p:childTnLst>
+              </p:cTn>
+              <p:nextCondLst>
+                <p:cond evt="onClick" delay="0">
+                  <p:tgtEl>
+                    <p:spTgt spid="5"/>
+                  </p:tgtEl>
+                </p:cond>
+              </p:nextCondLst>
+            </p:seq>
+            <p:video>
+              <p:cMediaNode vol="80000">
+                <p:cTn id="12" fill="hold" display="0">
+                  <p:stCondLst>
+                    <p:cond delay="indefinite"/>
+                  </p:stCondLst>
+                </p:cTn>
+                <p:tgtEl>
+                  <p:spTgt spid="5"/>
+                </p:tgtEl>
+              </p:cMediaNode>
+            </p:video>
+          </p:childTnLst>
+        </p:cTn>
+      </p:par>
+    </p:tnLst>
+  </p:timing>
+</p:sld>
+</file>
+
+<file path=ppt/slides/slide18.xml><?xml version="1.0" encoding="utf-8"?>
+<p:sld xmlns:a="http://schemas.openxmlformats.org/drawingml/2006/main" xmlns:r="http://schemas.openxmlformats.org/officeDocument/2006/relationships" xmlns:p="http://schemas.openxmlformats.org/presentationml/2006/main">
+  <p:cSld>
+    <p:spTree>
+      <p:nvGrpSpPr>
+        <p:cNvPr id="1" name=""/>
+        <p:cNvGrpSpPr/>
+        <p:nvPr/>
+      </p:nvGrpSpPr>
+      <p:grpSpPr>
+        <a:xfrm>
+          <a:off x="0" y="0"/>
+          <a:ext cx="0" cy="0"/>
+          <a:chOff x="0" y="0"/>
+          <a:chExt cx="0" cy="0"/>
+        </a:xfrm>
+      </p:grpSpPr>
+      <p:sp>
+        <p:nvSpPr>
+          <p:cNvPr id="3" name="Content Placeholder 2">
+            <a:extLst>
+              <a:ext uri="{FF2B5EF4-FFF2-40B4-BE49-F238E27FC236}">
+                <a16:creationId xmlns:a16="http://schemas.microsoft.com/office/drawing/2014/main" id="{2D559DA1-A73D-A9B7-5881-1BCE4CA4E3F8}"/>
+              </a:ext>
+            </a:extLst>
+          </p:cNvPr>
+          <p:cNvSpPr>
+            <a:spLocks noGrp="1"/>
+          </p:cNvSpPr>
+          <p:nvPr>
+            <p:ph idx="1"/>
+          </p:nvPr>
+        </p:nvSpPr>
+        <p:spPr>
+          <a:xfrm>
+            <a:off x="462987" y="335666"/>
+            <a:ext cx="3978384" cy="6342926"/>
+          </a:xfrm>
+        </p:spPr>
+        <p:txBody>
+          <a:bodyPr>
+            <a:normAutofit/>
+          </a:bodyPr>
+          <a:lstStyle/>
+          <a:p>
+            <a:r>
+              <a:rPr lang="en-US" dirty="0"/>
+              <a:t>In 2025, US Department of Health and Human Services revoked federal research grants on mRNA vaccines including $700 million contract to drugmaker Moderna to develop a vaccine against bird flu.</a:t>
+            </a:r>
+          </a:p>
+          <a:p>
+            <a:r>
+              <a:rPr lang="en-US" dirty="0"/>
+              <a:t>Many scientists regard mRNA shots as best option for protecting Americans in a pandemic.</a:t>
+            </a:r>
+          </a:p>
+        </p:txBody>
+      </p:sp>
+      <p:pic>
+        <p:nvPicPr>
+          <p:cNvPr id="8" name="Picture 7">
+            <a:extLst>
+              <a:ext uri="{FF2B5EF4-FFF2-40B4-BE49-F238E27FC236}">
+                <a16:creationId xmlns:a16="http://schemas.microsoft.com/office/drawing/2014/main" id="{E20FEACE-493E-AC2C-BAEC-DEE873BCAA66}"/>
+              </a:ext>
+            </a:extLst>
+          </p:cNvPr>
+          <p:cNvPicPr>
+            <a:picLocks noChangeAspect="1"/>
+          </p:cNvPicPr>
+          <p:nvPr/>
+        </p:nvPicPr>
+        <p:blipFill>
+          <a:blip r:embed="rId3"/>
+          <a:stretch>
+            <a:fillRect/>
+          </a:stretch>
+        </p:blipFill>
+        <p:spPr>
+          <a:xfrm>
+            <a:off x="4649716" y="598466"/>
+            <a:ext cx="7250661" cy="5316196"/>
+          </a:xfrm>
+          <a:prstGeom prst="rect">
+            <a:avLst/>
+          </a:prstGeom>
+        </p:spPr>
+      </p:pic>
+    </p:spTree>
+    <p:extLst>
+      <p:ext uri="{BB962C8B-B14F-4D97-AF65-F5344CB8AC3E}">
+        <p14:creationId xmlns:p14="http://schemas.microsoft.com/office/powerpoint/2010/main" val="208562549"/>
+      </p:ext>
+    </p:extLst>
+  </p:cSld>
+  <p:clrMapOvr>
+    <a:masterClrMapping/>
+  </p:clrMapOvr>
+</p:sld>
+</file>
+
 <file path=ppt/slides/slide2.xml><?xml version="1.0" encoding="utf-8"?>
 <p:sld xmlns:a="http://schemas.openxmlformats.org/drawingml/2006/main" xmlns:r="http://schemas.openxmlformats.org/officeDocument/2006/relationships" xmlns:p="http://schemas.openxmlformats.org/presentationml/2006/main">
   <p:cSld>
@@ -4413,6 +7602,536 @@
     <p:extLst>
       <p:ext uri="{BB962C8B-B14F-4D97-AF65-F5344CB8AC3E}">
         <p14:creationId xmlns:p14="http://schemas.microsoft.com/office/powerpoint/2010/main" val="820572588"/>
+      </p:ext>
+    </p:extLst>
+  </p:cSld>
+  <p:clrMapOvr>
+    <a:masterClrMapping/>
+  </p:clrMapOvr>
+</p:sld>
+</file>
+
+<file path=ppt/slides/slide7.xml><?xml version="1.0" encoding="utf-8"?>
+<p:sld xmlns:a="http://schemas.openxmlformats.org/drawingml/2006/main" xmlns:r="http://schemas.openxmlformats.org/officeDocument/2006/relationships" xmlns:p="http://schemas.openxmlformats.org/presentationml/2006/main">
+  <p:cSld>
+    <p:spTree>
+      <p:nvGrpSpPr>
+        <p:cNvPr id="1" name=""/>
+        <p:cNvGrpSpPr/>
+        <p:nvPr/>
+      </p:nvGrpSpPr>
+      <p:grpSpPr>
+        <a:xfrm>
+          <a:off x="0" y="0"/>
+          <a:ext cx="0" cy="0"/>
+          <a:chOff x="0" y="0"/>
+          <a:chExt cx="0" cy="0"/>
+        </a:xfrm>
+      </p:grpSpPr>
+      <p:sp>
+        <p:nvSpPr>
+          <p:cNvPr id="2" name="Title 1"/>
+          <p:cNvSpPr>
+            <a:spLocks noGrp="1"/>
+          </p:cNvSpPr>
+          <p:nvPr>
+            <p:ph type="title"/>
+          </p:nvPr>
+        </p:nvSpPr>
+        <p:spPr>
+          <a:xfrm>
+            <a:off x="3902968" y="365125"/>
+            <a:ext cx="7450831" cy="1325563"/>
+          </a:xfrm>
+        </p:spPr>
+        <p:txBody>
+          <a:bodyPr>
+            <a:normAutofit/>
+          </a:bodyPr>
+          <a:lstStyle/>
+          <a:p>
+            <a:pPr algn="ctr"/>
+            <a:r>
+              <a:rPr lang="en-US" dirty="0"/>
+              <a:t>The middle income effect</a:t>
+            </a:r>
+          </a:p>
+        </p:txBody>
+      </p:sp>
+      <p:sp>
+        <p:nvSpPr>
+          <p:cNvPr id="3" name="Content Placeholder 2"/>
+          <p:cNvSpPr>
+            <a:spLocks noGrp="1"/>
+          </p:cNvSpPr>
+          <p:nvPr>
+            <p:ph idx="1"/>
+          </p:nvPr>
+        </p:nvSpPr>
+        <p:spPr>
+          <a:xfrm>
+            <a:off x="163286" y="497711"/>
+            <a:ext cx="3739682" cy="6401132"/>
+          </a:xfrm>
+        </p:spPr>
+        <p:txBody>
+          <a:bodyPr>
+            <a:normAutofit/>
+          </a:bodyPr>
+          <a:lstStyle/>
+          <a:p>
+            <a:r>
+              <a:rPr lang="en-US" sz="3200" dirty="0"/>
+              <a:t>Focus of childhood immunization has been on the world’s poorest people. </a:t>
+            </a:r>
+          </a:p>
+          <a:p>
+            <a:r>
+              <a:rPr lang="en-US" sz="3200" dirty="0"/>
+              <a:t>GAVI is an international non-governmental association that has provided billions of low-cost vaccines to the world’s poorer countries</a:t>
+            </a:r>
+          </a:p>
+        </p:txBody>
+      </p:sp>
+      <p:pic>
+        <p:nvPicPr>
+          <p:cNvPr id="6" name="Picture 5">
+            <a:extLst>
+              <a:ext uri="{FF2B5EF4-FFF2-40B4-BE49-F238E27FC236}">
+                <a16:creationId xmlns:a16="http://schemas.microsoft.com/office/drawing/2014/main" id="{BB5503BC-4E23-0A62-A9D2-B89C7B839399}"/>
+              </a:ext>
+            </a:extLst>
+          </p:cNvPr>
+          <p:cNvPicPr>
+            <a:picLocks noChangeAspect="1"/>
+          </p:cNvPicPr>
+          <p:nvPr/>
+        </p:nvPicPr>
+        <p:blipFill>
+          <a:blip r:embed="rId3"/>
+          <a:srcRect r="4401"/>
+          <a:stretch>
+            <a:fillRect/>
+          </a:stretch>
+        </p:blipFill>
+        <p:spPr>
+          <a:xfrm>
+            <a:off x="4146037" y="1690688"/>
+            <a:ext cx="7799037" cy="3779874"/>
+          </a:xfrm>
+          <a:prstGeom prst="rect">
+            <a:avLst/>
+          </a:prstGeom>
+        </p:spPr>
+      </p:pic>
+    </p:spTree>
+    <p:extLst>
+      <p:ext uri="{BB962C8B-B14F-4D97-AF65-F5344CB8AC3E}">
+        <p14:creationId xmlns:p14="http://schemas.microsoft.com/office/powerpoint/2010/main" val="3463692976"/>
+      </p:ext>
+    </p:extLst>
+  </p:cSld>
+  <p:clrMapOvr>
+    <a:masterClrMapping/>
+  </p:clrMapOvr>
+</p:sld>
+</file>
+
+<file path=ppt/slides/slide8.xml><?xml version="1.0" encoding="utf-8"?>
+<p:sld xmlns:a="http://schemas.openxmlformats.org/drawingml/2006/main" xmlns:r="http://schemas.openxmlformats.org/officeDocument/2006/relationships" xmlns:p="http://schemas.openxmlformats.org/presentationml/2006/main">
+  <p:cSld>
+    <p:spTree>
+      <p:nvGrpSpPr>
+        <p:cNvPr id="1" name=""/>
+        <p:cNvGrpSpPr/>
+        <p:nvPr/>
+      </p:nvGrpSpPr>
+      <p:grpSpPr>
+        <a:xfrm>
+          <a:off x="0" y="0"/>
+          <a:ext cx="0" cy="0"/>
+          <a:chOff x="0" y="0"/>
+          <a:chExt cx="0" cy="0"/>
+        </a:xfrm>
+      </p:grpSpPr>
+      <p:pic>
+        <p:nvPicPr>
+          <p:cNvPr id="5" name="Content Placeholder 4">
+            <a:hlinkClick r:id="rId3"/>
+            <a:extLst>
+              <a:ext uri="{FF2B5EF4-FFF2-40B4-BE49-F238E27FC236}">
+                <a16:creationId xmlns:a16="http://schemas.microsoft.com/office/drawing/2014/main" id="{4224A871-F1D3-F9F2-C4E2-FF97A763CD1C}"/>
+              </a:ext>
+            </a:extLst>
+          </p:cNvPr>
+          <p:cNvPicPr>
+            <a:picLocks noGrp="1" noChangeAspect="1"/>
+          </p:cNvPicPr>
+          <p:nvPr>
+            <p:ph idx="1"/>
+          </p:nvPr>
+        </p:nvPicPr>
+        <p:blipFill>
+          <a:blip r:embed="rId4"/>
+          <a:srcRect r="12273"/>
+          <a:stretch/>
+        </p:blipFill>
+        <p:spPr>
+          <a:xfrm>
+            <a:off x="4287148" y="1053592"/>
+            <a:ext cx="7625588" cy="3759985"/>
+          </a:xfrm>
+          <a:noFill/>
+          <a:ln w="41275">
+            <a:solidFill>
+              <a:schemeClr val="accent1"/>
+            </a:solidFill>
+          </a:ln>
+        </p:spPr>
+      </p:pic>
+      <p:sp>
+        <p:nvSpPr>
+          <p:cNvPr id="2" name="Content Placeholder 2">
+            <a:extLst>
+              <a:ext uri="{FF2B5EF4-FFF2-40B4-BE49-F238E27FC236}">
+                <a16:creationId xmlns:a16="http://schemas.microsoft.com/office/drawing/2014/main" id="{910E8058-7FD1-1114-0748-DF725198F97B}"/>
+              </a:ext>
+            </a:extLst>
+          </p:cNvPr>
+          <p:cNvSpPr txBox="1">
+            <a:spLocks/>
+          </p:cNvSpPr>
+          <p:nvPr/>
+        </p:nvSpPr>
+        <p:spPr>
+          <a:xfrm>
+            <a:off x="386025" y="752354"/>
+            <a:ext cx="3532414" cy="5839188"/>
+          </a:xfrm>
+          <a:prstGeom prst="rect">
+            <a:avLst/>
+          </a:prstGeom>
+        </p:spPr>
+        <p:txBody>
+          <a:bodyPr vert="horz" lIns="91440" tIns="45720" rIns="91440" bIns="45720" rtlCol="0">
+            <a:normAutofit/>
+          </a:bodyPr>
+          <a:lstStyle>
+            <a:lvl1pPr marL="228600" indent="-228600" algn="l" defTabSz="914400" rtl="0" eaLnBrk="1" latinLnBrk="0" hangingPunct="1">
+              <a:lnSpc>
+                <a:spcPct val="90000"/>
+              </a:lnSpc>
+              <a:spcBef>
+                <a:spcPts val="1000"/>
+              </a:spcBef>
+              <a:buFont typeface="Arial" panose="020B0604020202020204" pitchFamily="34" charset="0"/>
+              <a:buChar char="•"/>
+              <a:defRPr sz="2800" kern="1200">
+                <a:solidFill>
+                  <a:schemeClr val="tx1"/>
+                </a:solidFill>
+                <a:latin typeface="+mn-lt"/>
+                <a:ea typeface="+mn-ea"/>
+                <a:cs typeface="+mn-cs"/>
+              </a:defRPr>
+            </a:lvl1pPr>
+            <a:lvl2pPr marL="685800" indent="-228600" algn="l" defTabSz="914400" rtl="0" eaLnBrk="1" latinLnBrk="0" hangingPunct="1">
+              <a:lnSpc>
+                <a:spcPct val="90000"/>
+              </a:lnSpc>
+              <a:spcBef>
+                <a:spcPts val="500"/>
+              </a:spcBef>
+              <a:buFont typeface="Arial" panose="020B0604020202020204" pitchFamily="34" charset="0"/>
+              <a:buChar char="•"/>
+              <a:defRPr sz="2400" kern="1200">
+                <a:solidFill>
+                  <a:schemeClr val="tx1"/>
+                </a:solidFill>
+                <a:latin typeface="+mn-lt"/>
+                <a:ea typeface="+mn-ea"/>
+                <a:cs typeface="+mn-cs"/>
+              </a:defRPr>
+            </a:lvl2pPr>
+            <a:lvl3pPr marL="1143000" indent="-228600" algn="l" defTabSz="914400" rtl="0" eaLnBrk="1" latinLnBrk="0" hangingPunct="1">
+              <a:lnSpc>
+                <a:spcPct val="90000"/>
+              </a:lnSpc>
+              <a:spcBef>
+                <a:spcPts val="500"/>
+              </a:spcBef>
+              <a:buFont typeface="Arial" panose="020B0604020202020204" pitchFamily="34" charset="0"/>
+              <a:buChar char="•"/>
+              <a:defRPr sz="2000" kern="1200">
+                <a:solidFill>
+                  <a:schemeClr val="tx1"/>
+                </a:solidFill>
+                <a:latin typeface="+mn-lt"/>
+                <a:ea typeface="+mn-ea"/>
+                <a:cs typeface="+mn-cs"/>
+              </a:defRPr>
+            </a:lvl3pPr>
+            <a:lvl4pPr marL="1600200" indent="-228600" algn="l" defTabSz="914400" rtl="0" eaLnBrk="1" latinLnBrk="0" hangingPunct="1">
+              <a:lnSpc>
+                <a:spcPct val="90000"/>
+              </a:lnSpc>
+              <a:spcBef>
+                <a:spcPts val="500"/>
+              </a:spcBef>
+              <a:buFont typeface="Arial" panose="020B0604020202020204" pitchFamily="34" charset="0"/>
+              <a:buChar char="•"/>
+              <a:defRPr sz="1800" kern="1200">
+                <a:solidFill>
+                  <a:schemeClr val="tx1"/>
+                </a:solidFill>
+                <a:latin typeface="+mn-lt"/>
+                <a:ea typeface="+mn-ea"/>
+                <a:cs typeface="+mn-cs"/>
+              </a:defRPr>
+            </a:lvl4pPr>
+            <a:lvl5pPr marL="2057400" indent="-228600" algn="l" defTabSz="914400" rtl="0" eaLnBrk="1" latinLnBrk="0" hangingPunct="1">
+              <a:lnSpc>
+                <a:spcPct val="90000"/>
+              </a:lnSpc>
+              <a:spcBef>
+                <a:spcPts val="500"/>
+              </a:spcBef>
+              <a:buFont typeface="Arial" panose="020B0604020202020204" pitchFamily="34" charset="0"/>
+              <a:buChar char="•"/>
+              <a:defRPr sz="1800" kern="1200">
+                <a:solidFill>
+                  <a:schemeClr val="tx1"/>
+                </a:solidFill>
+                <a:latin typeface="+mn-lt"/>
+                <a:ea typeface="+mn-ea"/>
+                <a:cs typeface="+mn-cs"/>
+              </a:defRPr>
+            </a:lvl5pPr>
+            <a:lvl6pPr marL="2514600" indent="-228600" algn="l" defTabSz="914400" rtl="0" eaLnBrk="1" latinLnBrk="0" hangingPunct="1">
+              <a:lnSpc>
+                <a:spcPct val="90000"/>
+              </a:lnSpc>
+              <a:spcBef>
+                <a:spcPts val="500"/>
+              </a:spcBef>
+              <a:buFont typeface="Arial" panose="020B0604020202020204" pitchFamily="34" charset="0"/>
+              <a:buChar char="•"/>
+              <a:defRPr sz="1800" kern="1200">
+                <a:solidFill>
+                  <a:schemeClr val="tx1"/>
+                </a:solidFill>
+                <a:latin typeface="+mn-lt"/>
+                <a:ea typeface="+mn-ea"/>
+                <a:cs typeface="+mn-cs"/>
+              </a:defRPr>
+            </a:lvl6pPr>
+            <a:lvl7pPr marL="2971800" indent="-228600" algn="l" defTabSz="914400" rtl="0" eaLnBrk="1" latinLnBrk="0" hangingPunct="1">
+              <a:lnSpc>
+                <a:spcPct val="90000"/>
+              </a:lnSpc>
+              <a:spcBef>
+                <a:spcPts val="500"/>
+              </a:spcBef>
+              <a:buFont typeface="Arial" panose="020B0604020202020204" pitchFamily="34" charset="0"/>
+              <a:buChar char="•"/>
+              <a:defRPr sz="1800" kern="1200">
+                <a:solidFill>
+                  <a:schemeClr val="tx1"/>
+                </a:solidFill>
+                <a:latin typeface="+mn-lt"/>
+                <a:ea typeface="+mn-ea"/>
+                <a:cs typeface="+mn-cs"/>
+              </a:defRPr>
+            </a:lvl7pPr>
+            <a:lvl8pPr marL="3429000" indent="-228600" algn="l" defTabSz="914400" rtl="0" eaLnBrk="1" latinLnBrk="0" hangingPunct="1">
+              <a:lnSpc>
+                <a:spcPct val="90000"/>
+              </a:lnSpc>
+              <a:spcBef>
+                <a:spcPts val="500"/>
+              </a:spcBef>
+              <a:buFont typeface="Arial" panose="020B0604020202020204" pitchFamily="34" charset="0"/>
+              <a:buChar char="•"/>
+              <a:defRPr sz="1800" kern="1200">
+                <a:solidFill>
+                  <a:schemeClr val="tx1"/>
+                </a:solidFill>
+                <a:latin typeface="+mn-lt"/>
+                <a:ea typeface="+mn-ea"/>
+                <a:cs typeface="+mn-cs"/>
+              </a:defRPr>
+            </a:lvl8pPr>
+            <a:lvl9pPr marL="3886200" indent="-228600" algn="l" defTabSz="914400" rtl="0" eaLnBrk="1" latinLnBrk="0" hangingPunct="1">
+              <a:lnSpc>
+                <a:spcPct val="90000"/>
+              </a:lnSpc>
+              <a:spcBef>
+                <a:spcPts val="500"/>
+              </a:spcBef>
+              <a:buFont typeface="Arial" panose="020B0604020202020204" pitchFamily="34" charset="0"/>
+              <a:buChar char="•"/>
+              <a:defRPr sz="1800" kern="1200">
+                <a:solidFill>
+                  <a:schemeClr val="tx1"/>
+                </a:solidFill>
+                <a:latin typeface="+mn-lt"/>
+                <a:ea typeface="+mn-ea"/>
+                <a:cs typeface="+mn-cs"/>
+              </a:defRPr>
+            </a:lvl9pPr>
+          </a:lstStyle>
+          <a:p>
+            <a:r>
+              <a:rPr lang="en-US" sz="3200" dirty="0"/>
+              <a:t>Manufacturing vaccines is a complex and expensive process</a:t>
+            </a:r>
+          </a:p>
+          <a:p>
+            <a:r>
+              <a:rPr lang="en-US" sz="3200" dirty="0"/>
+              <a:t>GAVI coordinates the availability of vaccines for countries that do not have the capacity to manufacture them</a:t>
+            </a:r>
+          </a:p>
+        </p:txBody>
+      </p:sp>
+    </p:spTree>
+    <p:extLst>
+      <p:ext uri="{BB962C8B-B14F-4D97-AF65-F5344CB8AC3E}">
+        <p14:creationId xmlns:p14="http://schemas.microsoft.com/office/powerpoint/2010/main" val="2961638733"/>
+      </p:ext>
+    </p:extLst>
+  </p:cSld>
+  <p:clrMapOvr>
+    <a:masterClrMapping/>
+  </p:clrMapOvr>
+</p:sld>
+</file>
+
+<file path=ppt/slides/slide9.xml><?xml version="1.0" encoding="utf-8"?>
+<p:sld xmlns:a="http://schemas.openxmlformats.org/drawingml/2006/main" xmlns:r="http://schemas.openxmlformats.org/officeDocument/2006/relationships" xmlns:p="http://schemas.openxmlformats.org/presentationml/2006/main">
+  <p:cSld>
+    <p:spTree>
+      <p:nvGrpSpPr>
+        <p:cNvPr id="1" name=""/>
+        <p:cNvGrpSpPr/>
+        <p:nvPr/>
+      </p:nvGrpSpPr>
+      <p:grpSpPr>
+        <a:xfrm>
+          <a:off x="0" y="0"/>
+          <a:ext cx="0" cy="0"/>
+          <a:chOff x="0" y="0"/>
+          <a:chExt cx="0" cy="0"/>
+        </a:xfrm>
+      </p:grpSpPr>
+      <p:sp>
+        <p:nvSpPr>
+          <p:cNvPr id="3" name="Content Placeholder 2"/>
+          <p:cNvSpPr>
+            <a:spLocks noGrp="1"/>
+          </p:cNvSpPr>
+          <p:nvPr>
+            <p:ph idx="1"/>
+          </p:nvPr>
+        </p:nvSpPr>
+        <p:spPr>
+          <a:xfrm>
+            <a:off x="235352" y="370390"/>
+            <a:ext cx="3086582" cy="5921808"/>
+          </a:xfrm>
+        </p:spPr>
+        <p:txBody>
+          <a:bodyPr>
+            <a:normAutofit lnSpcReduction="10000"/>
+          </a:bodyPr>
+          <a:lstStyle/>
+          <a:p>
+            <a:r>
+              <a:rPr lang="en-US" sz="3200" dirty="0"/>
+              <a:t>Routine immunization levels have stagnated in many middle income countries (MICs) because they are </a:t>
+            </a:r>
+            <a:r>
+              <a:rPr lang="en-US" sz="3200" b="1" dirty="0"/>
+              <a:t>too prosperous to qualify </a:t>
+            </a:r>
+            <a:r>
+              <a:rPr lang="en-US" sz="3200" dirty="0"/>
+              <a:t>for international support from GAVI</a:t>
+            </a:r>
+          </a:p>
+        </p:txBody>
+      </p:sp>
+      <p:sp>
+        <p:nvSpPr>
+          <p:cNvPr id="2" name="Title 1">
+            <a:extLst>
+              <a:ext uri="{FF2B5EF4-FFF2-40B4-BE49-F238E27FC236}">
+                <a16:creationId xmlns:a16="http://schemas.microsoft.com/office/drawing/2014/main" id="{C6F95B53-6ADD-9BBC-4673-BAA960718482}"/>
+              </a:ext>
+            </a:extLst>
+          </p:cNvPr>
+          <p:cNvSpPr>
+            <a:spLocks noGrp="1"/>
+          </p:cNvSpPr>
+          <p:nvPr>
+            <p:ph type="title"/>
+          </p:nvPr>
+        </p:nvSpPr>
+        <p:spPr>
+          <a:xfrm>
+            <a:off x="4261084" y="254693"/>
+            <a:ext cx="7450831" cy="1325563"/>
+          </a:xfrm>
+        </p:spPr>
+        <p:txBody>
+          <a:bodyPr>
+            <a:normAutofit/>
+          </a:bodyPr>
+          <a:lstStyle/>
+          <a:p>
+            <a:pPr algn="ctr"/>
+            <a:r>
+              <a:rPr lang="en-US" dirty="0"/>
+              <a:t>The middle income effect</a:t>
+            </a:r>
+          </a:p>
+        </p:txBody>
+      </p:sp>
+      <p:pic>
+        <p:nvPicPr>
+          <p:cNvPr id="7" name="Picture 6">
+            <a:extLst>
+              <a:ext uri="{FF2B5EF4-FFF2-40B4-BE49-F238E27FC236}">
+                <a16:creationId xmlns:a16="http://schemas.microsoft.com/office/drawing/2014/main" id="{D4D088C3-563A-6B59-8ADB-BADE2471B075}"/>
+              </a:ext>
+            </a:extLst>
+          </p:cNvPr>
+          <p:cNvPicPr>
+            <a:picLocks noChangeAspect="1"/>
+          </p:cNvPicPr>
+          <p:nvPr/>
+        </p:nvPicPr>
+        <p:blipFill>
+          <a:blip r:embed="rId3"/>
+          <a:srcRect l="3516" r="3030"/>
+          <a:stretch>
+            <a:fillRect/>
+          </a:stretch>
+        </p:blipFill>
+        <p:spPr>
+          <a:xfrm>
+            <a:off x="3657599" y="1580256"/>
+            <a:ext cx="8160153" cy="4711942"/>
+          </a:xfrm>
+          <a:prstGeom prst="rect">
+            <a:avLst/>
+          </a:prstGeom>
+        </p:spPr>
+      </p:pic>
+    </p:spTree>
+    <p:extLst>
+      <p:ext uri="{BB962C8B-B14F-4D97-AF65-F5344CB8AC3E}">
+        <p14:creationId xmlns:p14="http://schemas.microsoft.com/office/powerpoint/2010/main" val="4115885838"/>
       </p:ext>
     </p:extLst>
   </p:cSld>
